--- a/documents/project_presentation.pptx
+++ b/documents/project_presentation.pptx
@@ -771,7 +771,12 @@
             <p:ph type="title"/>
           </p:nvPr>
         </p:nvSpPr>
-        <p:spPr/>
+        <p:spPr>
+          <a:xfrm>
+            <a:off x="838200" y="365125"/>
+            <a:ext cx="10942122" cy="1325563"/>
+          </a:xfrm>
+        </p:spPr>
         <p:txBody>
           <a:bodyPr/>
           <a:lstStyle/>
@@ -799,7 +804,12 @@
             <p:ph idx="1"/>
           </p:nvPr>
         </p:nvSpPr>
-        <p:spPr/>
+        <p:spPr>
+          <a:xfrm>
+            <a:off x="838199" y="1825625"/>
+            <a:ext cx="10942121" cy="4351338"/>
+          </a:xfrm>
+        </p:spPr>
         <p:txBody>
           <a:bodyPr/>
           <a:lstStyle/>
@@ -885,12 +895,17 @@
             <p:ph type="ftr" sz="quarter" idx="11"/>
           </p:nvPr>
         </p:nvSpPr>
-        <p:spPr/>
-        <p:txBody>
-          <a:bodyPr/>
-          <a:lstStyle/>
-          <a:p>
-            <a:endParaRPr lang="en-US"/>
+        <p:spPr>
+          <a:xfrm>
+            <a:off x="4038600" y="6356350"/>
+            <a:ext cx="4658096" cy="365125"/>
+          </a:xfrm>
+        </p:spPr>
+        <p:txBody>
+          <a:bodyPr/>
+          <a:lstStyle/>
+          <a:p>
+            <a:endParaRPr lang="en-US" dirty="0"/>
           </a:p>
         </p:txBody>
       </p:sp>
@@ -910,7 +925,12 @@
             <p:ph type="sldNum" sz="quarter" idx="12"/>
           </p:nvPr>
         </p:nvSpPr>
-        <p:spPr/>
+        <p:spPr>
+          <a:xfrm>
+            <a:off x="9037120" y="6356350"/>
+            <a:ext cx="2743200" cy="365125"/>
+          </a:xfrm>
+        </p:spPr>
         <p:txBody>
           <a:bodyPr/>
           <a:lstStyle/>
@@ -2781,8 +2801,8 @@
         </p:nvSpPr>
         <p:spPr>
           <a:xfrm>
-            <a:off x="838200" y="365125"/>
-            <a:ext cx="10515600" cy="1325563"/>
+            <a:off x="838199" y="365125"/>
+            <a:ext cx="11021291" cy="1325563"/>
           </a:xfrm>
           <a:prstGeom prst="rect">
             <a:avLst/>
@@ -2820,7 +2840,7 @@
         <p:spPr>
           <a:xfrm>
             <a:off x="838200" y="1825625"/>
-            <a:ext cx="10515600" cy="4351338"/>
+            <a:ext cx="11021290" cy="4351338"/>
           </a:xfrm>
           <a:prstGeom prst="rect">
             <a:avLst/>
@@ -2934,7 +2954,7 @@
         <p:spPr>
           <a:xfrm>
             <a:off x="4038600" y="6356350"/>
-            <a:ext cx="4114800" cy="365125"/>
+            <a:ext cx="4622470" cy="365125"/>
           </a:xfrm>
           <a:prstGeom prst="rect">
             <a:avLst/>
@@ -2954,7 +2974,7 @@
             </a:lvl1pPr>
           </a:lstStyle>
           <a:p>
-            <a:endParaRPr lang="en-US"/>
+            <a:endParaRPr lang="en-US" dirty="0"/>
           </a:p>
         </p:txBody>
       </p:sp>
@@ -2976,7 +2996,7 @@
         </p:nvSpPr>
         <p:spPr>
           <a:xfrm>
-            <a:off x="8610600" y="6356350"/>
+            <a:off x="9116290" y="6355443"/>
             <a:ext cx="2743200" cy="365125"/>
           </a:xfrm>
           <a:prstGeom prst="rect">
@@ -3005,6 +3025,42 @@
           </a:p>
         </p:txBody>
       </p:sp>
+      <p:pic>
+        <p:nvPicPr>
+          <p:cNvPr id="7" name="Picture 6">
+            <a:extLst>
+              <a:ext uri="{FF2B5EF4-FFF2-40B4-BE49-F238E27FC236}">
+                <a16:creationId xmlns:a16="http://schemas.microsoft.com/office/drawing/2014/main" id="{677E9385-ADAF-1198-BD0A-2E14179C01B0}"/>
+              </a:ext>
+            </a:extLst>
+          </p:cNvPr>
+          <p:cNvPicPr>
+            <a:picLocks noChangeAspect="1"/>
+          </p:cNvPicPr>
+          <p:nvPr userDrawn="1"/>
+        </p:nvPicPr>
+        <p:blipFill>
+          <a:blip r:embed="rId13">
+            <a:extLst>
+              <a:ext uri="{28A0092B-C50C-407E-A947-70E740481C1C}">
+                <a14:useLocalDpi xmlns:a14="http://schemas.microsoft.com/office/drawing/2010/main" val="0"/>
+              </a:ext>
+            </a:extLst>
+          </a:blip>
+          <a:stretch>
+            <a:fillRect/>
+          </a:stretch>
+        </p:blipFill>
+        <p:spPr>
+          <a:xfrm>
+            <a:off x="9836714" y="269612"/>
+            <a:ext cx="2082165" cy="547370"/>
+          </a:xfrm>
+          <a:prstGeom prst="rect">
+            <a:avLst/>
+          </a:prstGeom>
+        </p:spPr>
+      </p:pic>
     </p:spTree>
     <p:extLst>
       <p:ext uri="{BB962C8B-B14F-4D97-AF65-F5344CB8AC3E}">
@@ -3342,7 +3398,12 @@
             <p:ph type="ctrTitle"/>
           </p:nvPr>
         </p:nvSpPr>
-        <p:spPr/>
+        <p:spPr>
+          <a:xfrm>
+            <a:off x="1070372" y="838580"/>
+            <a:ext cx="10051255" cy="973932"/>
+          </a:xfrm>
+        </p:spPr>
         <p:txBody>
           <a:bodyPr>
             <a:normAutofit/>
@@ -3350,7 +3411,7 @@
           <a:lstStyle/>
           <a:p>
             <a:r>
-              <a:rPr lang="en-US" sz="3600" b="1" dirty="0">
+              <a:rPr lang="en-US" sz="4000" b="1" dirty="0">
                 <a:solidFill>
                   <a:schemeClr val="tx2">
                     <a:lumMod val="75000"/>
@@ -3360,7 +3421,7 @@
               </a:rPr>
               <a:t>Optimization for 3D Scene Reconstruction</a:t>
             </a:r>
-            <a:endParaRPr lang="en-US" sz="3600" dirty="0">
+            <a:endParaRPr lang="en-US" sz="4000" dirty="0">
               <a:solidFill>
                 <a:schemeClr val="tx2">
                   <a:lumMod val="75000"/>
@@ -3389,8 +3450,8 @@
         </p:nvSpPr>
         <p:spPr>
           <a:xfrm>
-            <a:off x="528637" y="3602038"/>
-            <a:ext cx="11165681" cy="1655762"/>
+            <a:off x="507205" y="1876012"/>
+            <a:ext cx="11165681" cy="826552"/>
           </a:xfrm>
         </p:spPr>
         <p:txBody>
@@ -3400,21 +3461,201 @@
           <a:lstStyle/>
           <a:p>
             <a:r>
-              <a:rPr lang="en-US" sz="1800" b="1" dirty="0">
+              <a:rPr lang="en-US" sz="2000" b="1" dirty="0">
                 <a:solidFill>
                   <a:srgbClr val="C00000"/>
                 </a:solidFill>
               </a:rPr>
-              <a:t>A Comparative Study of Optimizers, Losses, and Representations for NeRF and 3D Gaussian Splatting</a:t>
-            </a:r>
-            <a:endParaRPr lang="en-US" sz="1800" dirty="0">
-              <a:solidFill>
-                <a:srgbClr val="C00000"/>
-              </a:solidFill>
+              <a:t>A Comparative Study of Optimizers, Losses, and Representations</a:t>
+            </a:r>
+          </a:p>
+          <a:p>
+            <a:r>
+              <a:rPr lang="en-US" sz="2000" b="1" dirty="0">
+                <a:solidFill>
+                  <a:srgbClr val="C00000"/>
+                </a:solidFill>
+              </a:rPr>
+              <a:t>for NeRF and 3D Gaussian Splatting</a:t>
+            </a:r>
+          </a:p>
+        </p:txBody>
+      </p:sp>
+      <p:sp>
+        <p:nvSpPr>
+          <p:cNvPr id="5" name="TextBox 4">
+            <a:extLst>
+              <a:ext uri="{FF2B5EF4-FFF2-40B4-BE49-F238E27FC236}">
+                <a16:creationId xmlns:a16="http://schemas.microsoft.com/office/drawing/2014/main" id="{35FD8BB9-A56F-3CAC-589D-584CC60B0BA9}"/>
+              </a:ext>
+            </a:extLst>
+          </p:cNvPr>
+          <p:cNvSpPr txBox="1"/>
+          <p:nvPr/>
+        </p:nvSpPr>
+        <p:spPr>
+          <a:xfrm>
+            <a:off x="4287215" y="6441947"/>
+            <a:ext cx="3690715" cy="285271"/>
+          </a:xfrm>
+          <a:prstGeom prst="rect">
+            <a:avLst/>
+          </a:prstGeom>
+          <a:noFill/>
+        </p:spPr>
+        <p:txBody>
+          <a:bodyPr wrap="square">
+            <a:spAutoFit/>
+          </a:bodyPr>
+          <a:lstStyle/>
+          <a:p>
+            <a:pPr marL="0" marR="0" algn="ctr">
+              <a:lnSpc>
+                <a:spcPts val="1600"/>
+              </a:lnSpc>
+              <a:spcBef>
+                <a:spcPts val="900"/>
+              </a:spcBef>
+              <a:spcAft>
+                <a:spcPts val="900"/>
+              </a:spcAft>
+              <a:buNone/>
+            </a:pPr>
+            <a:r>
+              <a:rPr lang="pt-PT" sz="1100" b="1" dirty="0">
+                <a:effectLst/>
+                <a:latin typeface="Aptos" panose="020B0004020202020204" pitchFamily="34" charset="0"/>
+                <a:ea typeface="Times New Roman" panose="02020603050405020304" pitchFamily="18" charset="0"/>
+                <a:cs typeface="Times New Roman" panose="02020603050405020304" pitchFamily="18" charset="0"/>
+              </a:rPr>
+              <a:t>António Cruz</a:t>
+            </a:r>
+            <a:r>
+              <a:rPr lang="pt-PT" sz="1100" dirty="0">
+                <a:effectLst/>
+                <a:latin typeface="Aptos" panose="020B0004020202020204" pitchFamily="34" charset="0"/>
+                <a:ea typeface="Times New Roman" panose="02020603050405020304" pitchFamily="18" charset="0"/>
+                <a:cs typeface="Times New Roman" panose="02020603050405020304" pitchFamily="18" charset="0"/>
+              </a:rPr>
+              <a:t> (140129), </a:t>
+            </a:r>
+            <a:r>
+              <a:rPr lang="pt-PT" sz="1100" b="1" dirty="0">
+                <a:effectLst/>
+                <a:latin typeface="Aptos" panose="020B0004020202020204" pitchFamily="34" charset="0"/>
+                <a:ea typeface="Times New Roman" panose="02020603050405020304" pitchFamily="18" charset="0"/>
+                <a:cs typeface="Times New Roman" panose="02020603050405020304" pitchFamily="18" charset="0"/>
+              </a:rPr>
+              <a:t>Duarte Cabrita</a:t>
+            </a:r>
+            <a:r>
+              <a:rPr lang="pt-PT" sz="1100" dirty="0">
+                <a:effectLst/>
+                <a:latin typeface="Aptos" panose="020B0004020202020204" pitchFamily="34" charset="0"/>
+                <a:ea typeface="Times New Roman" panose="02020603050405020304" pitchFamily="18" charset="0"/>
+                <a:cs typeface="Times New Roman" panose="02020603050405020304" pitchFamily="18" charset="0"/>
+              </a:rPr>
+              <a:t> (120058)</a:t>
+            </a:r>
+            <a:endParaRPr lang="en-US" dirty="0">
+              <a:effectLst/>
+              <a:latin typeface="Aptos" panose="020B0004020202020204" pitchFamily="34" charset="0"/>
+              <a:ea typeface="Times New Roman" panose="02020603050405020304" pitchFamily="18" charset="0"/>
+              <a:cs typeface="Times New Roman" panose="02020603050405020304" pitchFamily="18" charset="0"/>
             </a:endParaRPr>
           </a:p>
         </p:txBody>
       </p:sp>
+      <p:pic>
+        <p:nvPicPr>
+          <p:cNvPr id="8" name="Picture 7">
+            <a:extLst>
+              <a:ext uri="{FF2B5EF4-FFF2-40B4-BE49-F238E27FC236}">
+                <a16:creationId xmlns:a16="http://schemas.microsoft.com/office/drawing/2014/main" id="{EAEABF03-F305-B872-C410-E7C51EBD8ECA}"/>
+              </a:ext>
+            </a:extLst>
+          </p:cNvPr>
+          <p:cNvPicPr>
+            <a:picLocks noChangeAspect="1"/>
+          </p:cNvPicPr>
+          <p:nvPr/>
+        </p:nvPicPr>
+        <p:blipFill>
+          <a:blip r:embed="rId2"/>
+          <a:stretch>
+            <a:fillRect/>
+          </a:stretch>
+        </p:blipFill>
+        <p:spPr>
+          <a:xfrm>
+            <a:off x="10075177" y="2902591"/>
+            <a:ext cx="1236307" cy="3502868"/>
+          </a:xfrm>
+          <a:prstGeom prst="rect">
+            <a:avLst/>
+          </a:prstGeom>
+        </p:spPr>
+      </p:pic>
+      <p:pic>
+        <p:nvPicPr>
+          <p:cNvPr id="10" name="Picture 9">
+            <a:extLst>
+              <a:ext uri="{FF2B5EF4-FFF2-40B4-BE49-F238E27FC236}">
+                <a16:creationId xmlns:a16="http://schemas.microsoft.com/office/drawing/2014/main" id="{566F03AE-C45A-1058-7F7C-247F78CF367E}"/>
+              </a:ext>
+            </a:extLst>
+          </p:cNvPr>
+          <p:cNvPicPr>
+            <a:picLocks noChangeAspect="1"/>
+          </p:cNvPicPr>
+          <p:nvPr/>
+        </p:nvPicPr>
+        <p:blipFill>
+          <a:blip r:embed="rId3"/>
+          <a:stretch>
+            <a:fillRect/>
+          </a:stretch>
+        </p:blipFill>
+        <p:spPr>
+          <a:xfrm>
+            <a:off x="4549698" y="3429000"/>
+            <a:ext cx="3167943" cy="2588210"/>
+          </a:xfrm>
+          <a:prstGeom prst="rect">
+            <a:avLst/>
+          </a:prstGeom>
+        </p:spPr>
+      </p:pic>
+      <p:pic>
+        <p:nvPicPr>
+          <p:cNvPr id="12" name="Picture 11">
+            <a:extLst>
+              <a:ext uri="{FF2B5EF4-FFF2-40B4-BE49-F238E27FC236}">
+                <a16:creationId xmlns:a16="http://schemas.microsoft.com/office/drawing/2014/main" id="{D4B0073A-4B4D-F235-414D-95FE2CADFD8A}"/>
+              </a:ext>
+            </a:extLst>
+          </p:cNvPr>
+          <p:cNvPicPr>
+            <a:picLocks noChangeAspect="1"/>
+          </p:cNvPicPr>
+          <p:nvPr/>
+        </p:nvPicPr>
+        <p:blipFill>
+          <a:blip r:embed="rId4"/>
+          <a:stretch>
+            <a:fillRect/>
+          </a:stretch>
+        </p:blipFill>
+        <p:spPr>
+          <a:xfrm>
+            <a:off x="507205" y="3456222"/>
+            <a:ext cx="2655445" cy="2985725"/>
+          </a:xfrm>
+          <a:prstGeom prst="rect">
+            <a:avLst/>
+          </a:prstGeom>
+        </p:spPr>
+      </p:pic>
     </p:spTree>
     <p:extLst>
       <p:ext uri="{BB962C8B-B14F-4D97-AF65-F5344CB8AC3E}">
@@ -3491,19 +3732,24 @@
         </p:nvSpPr>
         <p:spPr>
           <a:xfrm>
-            <a:off x="838199" y="1825625"/>
-            <a:ext cx="11027569" cy="4667250"/>
+            <a:off x="838199" y="1825624"/>
+            <a:ext cx="11120439" cy="4832351"/>
           </a:xfrm>
         </p:spPr>
         <p:txBody>
           <a:bodyPr>
-            <a:normAutofit fontScale="92500"/>
+            <a:normAutofit fontScale="92500" lnSpcReduction="10000"/>
           </a:bodyPr>
           <a:lstStyle/>
           <a:p>
+            <a:pPr>
+              <a:lnSpc>
+                <a:spcPct val="100000"/>
+              </a:lnSpc>
+            </a:pPr>
             <a:r>
               <a:rPr lang="en-US" dirty="0"/>
-              <a:t>This project's chosen application is </a:t>
+              <a:t>This project’s chosen application is </a:t>
             </a:r>
             <a:r>
               <a:rPr lang="en-US" b="1" dirty="0"/>
@@ -3511,7 +3757,7 @@
             </a:r>
             <a:r>
               <a:rPr lang="en-US" dirty="0"/>
-              <a:t> (lesson 1 slides): "</a:t>
+              <a:t> (from Lesson 1 slides): "</a:t>
             </a:r>
             <a:r>
               <a:rPr lang="en-US" i="1" dirty="0"/>
@@ -3523,6 +3769,11 @@
             </a:r>
           </a:p>
           <a:p>
+            <a:pPr>
+              <a:lnSpc>
+                <a:spcPct val="100000"/>
+              </a:lnSpc>
+            </a:pPr>
             <a:r>
               <a:rPr lang="en-US" dirty="0"/>
               <a:t>Our implementation uses </a:t>
@@ -3545,34 +3796,55 @@
             </a:r>
           </a:p>
           <a:p>
+            <a:pPr>
+              <a:lnSpc>
+                <a:spcPct val="100000"/>
+              </a:lnSpc>
+            </a:pPr>
             <a:r>
               <a:rPr lang="en-US" dirty="0"/>
               <a:t>Although the primary application is computer vision, the project approaches several other items on the assignment's list:</a:t>
             </a:r>
           </a:p>
           <a:p>
-            <a:pPr lvl="1"/>
+            <a:pPr lvl="1">
+              <a:lnSpc>
+                <a:spcPct val="100000"/>
+              </a:lnSpc>
+            </a:pPr>
             <a:r>
               <a:rPr lang="en-US" dirty="0"/>
               <a:t>Supervised model training and DNN training (NeRF MLP)</a:t>
             </a:r>
           </a:p>
           <a:p>
-            <a:pPr lvl="1"/>
+            <a:pPr lvl="1">
+              <a:lnSpc>
+                <a:spcPct val="100000"/>
+              </a:lnSpc>
+            </a:pPr>
             <a:r>
               <a:rPr lang="en-US" dirty="0"/>
               <a:t>SGD and its variants (optimizers)</a:t>
             </a:r>
           </a:p>
           <a:p>
-            <a:pPr lvl="1"/>
+            <a:pPr lvl="1">
+              <a:lnSpc>
+                <a:spcPct val="100000"/>
+              </a:lnSpc>
+            </a:pPr>
             <a:r>
               <a:rPr lang="en-US" dirty="0"/>
               <a:t>Hyperparameter and Bayesian optimization (TPE/Optuna)</a:t>
             </a:r>
           </a:p>
           <a:p>
-            <a:pPr lvl="1"/>
+            <a:pPr lvl="1">
+              <a:lnSpc>
+                <a:spcPct val="100000"/>
+              </a:lnSpc>
+            </a:pPr>
             <a:r>
               <a:rPr lang="en-US" dirty="0"/>
               <a:t>Structure-from-Motion bundle adjustment (COLMAP)</a:t>
@@ -3666,6 +3938,11 @@
               <a:bodyPr/>
               <a:lstStyle/>
               <a:p>
+                <a:pPr>
+                  <a:lnSpc>
+                    <a:spcPct val="100000"/>
+                  </a:lnSpc>
+                </a:pPr>
                 <a:r>
                   <a:rPr lang="en-US" dirty="0"/>
                   <a:t>NeRF and GS are two different parameterizations of the same minimization problem:</a:t>
@@ -3907,6 +4184,11 @@
                 <a:endParaRPr lang="en-US" dirty="0"/>
               </a:p>
               <a:p>
+                <a:pPr>
+                  <a:lnSpc>
+                    <a:spcPct val="100000"/>
+                  </a:lnSpc>
+                </a:pPr>
                 <a:r>
                   <a:rPr lang="en-US" dirty="0"/>
                   <a:t>In plain language, this equation can be translated as: “</a:t>
@@ -3994,7 +4276,7 @@
               <a:blipFill>
                 <a:blip r:embed="rId2"/>
                 <a:stretch>
-                  <a:fillRect l="-1008" t="-2279"/>
+                  <a:fillRect l="-1008" t="-1340"/>
                 </a:stretch>
               </a:blipFill>
             </p:spPr>
@@ -4092,15 +4374,20 @@
             <p:spPr>
               <a:xfrm>
                 <a:off x="838199" y="1825624"/>
-                <a:ext cx="11013281" cy="4582319"/>
+                <a:ext cx="11013281" cy="4803776"/>
               </a:xfrm>
             </p:spPr>
             <p:txBody>
               <a:bodyPr>
-                <a:normAutofit lnSpcReduction="10000"/>
+                <a:normAutofit fontScale="92500" lnSpcReduction="10000"/>
               </a:bodyPr>
               <a:lstStyle/>
               <a:p>
+                <a:pPr>
+                  <a:lnSpc>
+                    <a:spcPct val="110000"/>
+                  </a:lnSpc>
+                </a:pPr>
                 <a:r>
                   <a:rPr lang="en-US" dirty="0"/>
                   <a:t>Both methods solve exactly the same minimization. They differ in the parameterization of</a:t>
@@ -4147,6 +4434,11 @@
                 </a:r>
               </a:p>
               <a:p>
+                <a:pPr>
+                  <a:lnSpc>
+                    <a:spcPct val="110000"/>
+                  </a:lnSpc>
+                </a:pPr>
                 <a:r>
                   <a:rPr lang="en-US" dirty="0"/>
                   <a:t>Therefore, NeRF vs GS </a:t>
@@ -4161,7 +4453,11 @@
                 </a:r>
               </a:p>
               <a:p>
-                <a:pPr lvl="1"/>
+                <a:pPr lvl="1">
+                  <a:lnSpc>
+                    <a:spcPct val="110000"/>
+                  </a:lnSpc>
+                </a:pPr>
                 <a:r>
                   <a:rPr lang="en-US" dirty="0"/>
                   <a:t>The data are </a:t>
@@ -4257,14 +4553,22 @@
                 </a:r>
               </a:p>
               <a:p>
-                <a:pPr lvl="1"/>
+                <a:pPr lvl="1">
+                  <a:lnSpc>
+                    <a:spcPct val="110000"/>
+                  </a:lnSpc>
+                </a:pPr>
                 <a:r>
                   <a:rPr lang="en-US" dirty="0"/>
                   <a:t>The objective is the average photometric loss between a rendered image and its ground truth.</a:t>
                 </a:r>
               </a:p>
               <a:p>
-                <a:pPr lvl="1"/>
+                <a:pPr lvl="1">
+                  <a:lnSpc>
+                    <a:spcPct val="110000"/>
+                  </a:lnSpc>
+                </a:pPr>
                 <a:r>
                   <a:rPr lang="en-US" dirty="0"/>
                   <a:t>The decision variable is </a:t>
@@ -4285,7 +4589,11 @@
                 </a:r>
               </a:p>
               <a:p>
-                <a:pPr lvl="1"/>
+                <a:pPr lvl="1">
+                  <a:lnSpc>
+                    <a:spcPct val="110000"/>
+                  </a:lnSpc>
+                </a:pPr>
                 <a:r>
                   <a:rPr lang="en-US" dirty="0"/>
                   <a:t>The operator </a:t>
@@ -4315,24 +4623,16 @@
                   </m:oMath>
                 </a14:m>
                 <a:r>
-                  <a:rPr lang="en-US"/>
-                  <a:t> </a:t>
-                </a:r>
-                <a:r>
                   <a:rPr lang="en-US" dirty="0"/>
-                  <a:t>and a </a:t>
-                </a:r>
-                <a:r>
-                  <a:rPr lang="en-US"/>
-                  <a:t>camera pose, </a:t>
-                </a:r>
-                <a:r>
-                  <a:rPr lang="en-US" dirty="0"/>
-                  <a:t>and returns the image that scene would produce from that pose.</a:t>
+                  <a:t> and a camera pose, and returns the image that scene would produce from that pose.</a:t>
                 </a:r>
               </a:p>
               <a:p>
-                <a:pPr lvl="1"/>
+                <a:pPr lvl="1">
+                  <a:lnSpc>
+                    <a:spcPct val="110000"/>
+                  </a:lnSpc>
+                </a:pPr>
                 <a:r>
                   <a:rPr lang="en-US" dirty="0"/>
                   <a:t>The only requirement on </a:t>
@@ -4417,12 +4717,12 @@
             <p:spPr>
               <a:xfrm>
                 <a:off x="838199" y="1825624"/>
-                <a:ext cx="11013281" cy="4582319"/>
+                <a:ext cx="11013281" cy="4803776"/>
               </a:xfrm>
               <a:blipFill>
                 <a:blip r:embed="rId2"/>
                 <a:stretch>
-                  <a:fillRect l="-941" t="-2926" r="-830"/>
+                  <a:fillRect l="-830" t="-1141" r="-1051" b="-2662"/>
                 </a:stretch>
               </a:blipFill>
             </p:spPr>
@@ -4492,7 +4792,10 @@
           <a:bodyPr/>
           <a:lstStyle/>
           <a:p>
-            <a:endParaRPr lang="en-US"/>
+            <a:r>
+              <a:rPr lang="en-US" dirty="0"/>
+              <a:t>Optimizers</a:t>
+            </a:r>
           </a:p>
         </p:txBody>
       </p:sp>
@@ -4512,12 +4815,99 @@
             <p:ph idx="1"/>
           </p:nvPr>
         </p:nvSpPr>
-        <p:spPr/>
-        <p:txBody>
-          <a:bodyPr/>
-          <a:lstStyle/>
-          <a:p>
-            <a:endParaRPr lang="en-US"/>
+        <p:spPr>
+          <a:xfrm>
+            <a:off x="838200" y="1825625"/>
+            <a:ext cx="10927556" cy="4667250"/>
+          </a:xfrm>
+        </p:spPr>
+        <p:txBody>
+          <a:bodyPr>
+            <a:normAutofit fontScale="77500" lnSpcReduction="20000"/>
+          </a:bodyPr>
+          <a:lstStyle/>
+          <a:p>
+            <a:pPr>
+              <a:lnSpc>
+                <a:spcPts val="2640"/>
+              </a:lnSpc>
+            </a:pPr>
+            <a:r>
+              <a:rPr lang="en-US" b="1" dirty="0"/>
+              <a:t>SGD</a:t>
+            </a:r>
+            <a:r>
+              <a:rPr lang="en-US" dirty="0"/>
+              <a:t> - Step in the direction of the negative gradient, with a fixed learning rate (simplest possible recipe).</a:t>
+            </a:r>
+          </a:p>
+          <a:p>
+            <a:pPr>
+              <a:lnSpc>
+                <a:spcPts val="2640"/>
+              </a:lnSpc>
+            </a:pPr>
+            <a:r>
+              <a:rPr lang="en-US" b="1" dirty="0"/>
+              <a:t>SGD with momentum</a:t>
+            </a:r>
+            <a:r>
+              <a:rPr lang="en-US" dirty="0"/>
+              <a:t> - Keep a running average of past gradients and step in that smoothed direction, which dampens noise and accelerates along consistent descent directions.</a:t>
+            </a:r>
+          </a:p>
+          <a:p>
+            <a:pPr>
+              <a:lnSpc>
+                <a:spcPts val="2640"/>
+              </a:lnSpc>
+            </a:pPr>
+            <a:r>
+              <a:rPr lang="en-US" b="1" dirty="0"/>
+              <a:t>SGD with Nesterov</a:t>
+            </a:r>
+            <a:r>
+              <a:rPr lang="en-US" dirty="0"/>
+              <a:t> - A variant of momentum that "looks ahead" before taking the step, giving slightly better convergence on convex problems.</a:t>
+            </a:r>
+          </a:p>
+          <a:p>
+            <a:pPr>
+              <a:lnSpc>
+                <a:spcPts val="2640"/>
+              </a:lnSpc>
+            </a:pPr>
+            <a:r>
+              <a:rPr lang="en-US" b="1" dirty="0"/>
+              <a:t>Adam</a:t>
+            </a:r>
+            <a:r>
+              <a:rPr lang="en-US" dirty="0"/>
+              <a:t> - Keep a running average of past gradients </a:t>
+            </a:r>
+            <a:r>
+              <a:rPr lang="en-US" i="1" dirty="0"/>
+              <a:t>and</a:t>
+            </a:r>
+            <a:r>
+              <a:rPr lang="en-US" dirty="0"/>
+              <a:t> a running average of past squared gradients, then divide the smoothed gradient by the smoothed magnitude. The effect is a per-parameter adaptive learning rate.</a:t>
+            </a:r>
+          </a:p>
+          <a:p>
+            <a:pPr>
+              <a:lnSpc>
+                <a:spcPts val="2640"/>
+              </a:lnSpc>
+            </a:pPr>
+            <a:r>
+              <a:rPr lang="en-US" b="1" dirty="0"/>
+              <a:t>AdamW</a:t>
+            </a:r>
+            <a:r>
+              <a:rPr lang="en-US" dirty="0"/>
+              <a:t>: Same as Adam, but with weight decay applied as a separate term outside the adaptive scaling, which fixes a subtle interaction in the original Adam formulation.</a:t>
+            </a:r>
           </a:p>
         </p:txBody>
       </p:sp>

--- a/documents/project_presentation.pptx
+++ b/documents/project_presentation.pptx
@@ -8,9 +8,13 @@
     <p:sldId id="256" r:id="rId2"/>
     <p:sldId id="257" r:id="rId3"/>
     <p:sldId id="258" r:id="rId4"/>
-    <p:sldId id="261" r:id="rId5"/>
-    <p:sldId id="259" r:id="rId6"/>
-    <p:sldId id="260" r:id="rId7"/>
+    <p:sldId id="264" r:id="rId5"/>
+    <p:sldId id="265" r:id="rId6"/>
+    <p:sldId id="261" r:id="rId7"/>
+    <p:sldId id="262" r:id="rId8"/>
+    <p:sldId id="263" r:id="rId9"/>
+    <p:sldId id="259" r:id="rId10"/>
+    <p:sldId id="260" r:id="rId11"/>
   </p:sldIdLst>
   <p:sldSz cx="12192000" cy="6858000"/>
   <p:notesSz cx="6858000" cy="9144000"/>
@@ -779,7 +783,18 @@
         </p:spPr>
         <p:txBody>
           <a:bodyPr/>
-          <a:lstStyle/>
+          <a:lstStyle>
+            <a:lvl1pPr>
+              <a:defRPr>
+                <a:solidFill>
+                  <a:schemeClr val="tx2">
+                    <a:lumMod val="75000"/>
+                    <a:lumOff val="25000"/>
+                  </a:schemeClr>
+                </a:solidFill>
+              </a:defRPr>
+            </a:lvl1pPr>
+          </a:lstStyle>
           <a:p>
             <a:r>
               <a:rPr lang="en-US"/>
@@ -3669,6 +3684,86 @@
 </p:sld>
 </file>
 
+<file path=ppt/slides/slide10.xml><?xml version="1.0" encoding="utf-8"?>
+<p:sld xmlns:a="http://schemas.openxmlformats.org/drawingml/2006/main" xmlns:r="http://schemas.openxmlformats.org/officeDocument/2006/relationships" xmlns:p="http://schemas.openxmlformats.org/presentationml/2006/main">
+  <p:cSld>
+    <p:spTree>
+      <p:nvGrpSpPr>
+        <p:cNvPr id="1" name=""/>
+        <p:cNvGrpSpPr/>
+        <p:nvPr/>
+      </p:nvGrpSpPr>
+      <p:grpSpPr>
+        <a:xfrm>
+          <a:off x="0" y="0"/>
+          <a:ext cx="0" cy="0"/>
+          <a:chOff x="0" y="0"/>
+          <a:chExt cx="0" cy="0"/>
+        </a:xfrm>
+      </p:grpSpPr>
+      <p:sp>
+        <p:nvSpPr>
+          <p:cNvPr id="2" name="Title 1">
+            <a:extLst>
+              <a:ext uri="{FF2B5EF4-FFF2-40B4-BE49-F238E27FC236}">
+                <a16:creationId xmlns:a16="http://schemas.microsoft.com/office/drawing/2014/main" id="{9097BCC7-4FF1-3D07-5134-53FC93EFF7C6}"/>
+              </a:ext>
+            </a:extLst>
+          </p:cNvPr>
+          <p:cNvSpPr>
+            <a:spLocks noGrp="1"/>
+          </p:cNvSpPr>
+          <p:nvPr>
+            <p:ph type="title"/>
+          </p:nvPr>
+        </p:nvSpPr>
+        <p:spPr/>
+        <p:txBody>
+          <a:bodyPr/>
+          <a:lstStyle/>
+          <a:p>
+            <a:endParaRPr lang="en-US"/>
+          </a:p>
+        </p:txBody>
+      </p:sp>
+      <p:sp>
+        <p:nvSpPr>
+          <p:cNvPr id="3" name="Content Placeholder 2">
+            <a:extLst>
+              <a:ext uri="{FF2B5EF4-FFF2-40B4-BE49-F238E27FC236}">
+                <a16:creationId xmlns:a16="http://schemas.microsoft.com/office/drawing/2014/main" id="{1377D735-29DE-3BC4-E96A-310A53AB2648}"/>
+              </a:ext>
+            </a:extLst>
+          </p:cNvPr>
+          <p:cNvSpPr>
+            <a:spLocks noGrp="1"/>
+          </p:cNvSpPr>
+          <p:nvPr>
+            <p:ph idx="1"/>
+          </p:nvPr>
+        </p:nvSpPr>
+        <p:spPr/>
+        <p:txBody>
+          <a:bodyPr/>
+          <a:lstStyle/>
+          <a:p>
+            <a:endParaRPr lang="en-US"/>
+          </a:p>
+        </p:txBody>
+      </p:sp>
+    </p:spTree>
+    <p:extLst>
+      <p:ext uri="{BB962C8B-B14F-4D97-AF65-F5344CB8AC3E}">
+        <p14:creationId xmlns:p14="http://schemas.microsoft.com/office/powerpoint/2010/main" val="439802827"/>
+      </p:ext>
+    </p:extLst>
+  </p:cSld>
+  <p:clrMapOvr>
+    <a:masterClrMapping/>
+  </p:clrMapOvr>
+</p:sld>
+</file>
+
 <file path=ppt/slides/slide2.xml><?xml version="1.0" encoding="utf-8"?>
 <p:sld xmlns:a="http://schemas.openxmlformats.org/drawingml/2006/main" xmlns:r="http://schemas.openxmlformats.org/officeDocument/2006/relationships" xmlns:p="http://schemas.openxmlformats.org/presentationml/2006/main">
   <p:cSld>
@@ -3931,11 +4026,13 @@
             <p:spPr>
               <a:xfrm>
                 <a:off x="838200" y="1825624"/>
-                <a:ext cx="10884694" cy="4546601"/>
+                <a:ext cx="10884694" cy="4875214"/>
               </a:xfrm>
             </p:spPr>
             <p:txBody>
-              <a:bodyPr/>
+              <a:bodyPr>
+                <a:normAutofit lnSpcReduction="10000"/>
+              </a:bodyPr>
               <a:lstStyle/>
               <a:p>
                 <a:pPr>
@@ -4181,38 +4278,35 @@
                 <a:endParaRPr lang="en-US" dirty="0"/>
               </a:p>
               <a:p>
-                <a:endParaRPr lang="en-US" dirty="0"/>
-              </a:p>
-              <a:p>
                 <a:pPr>
                   <a:lnSpc>
                     <a:spcPct val="100000"/>
                   </a:lnSpc>
                 </a:pPr>
                 <a:r>
-                  <a:rPr lang="en-US" dirty="0"/>
+                  <a:rPr lang="en-US" sz="2400" dirty="0"/>
                   <a:t>In plain language, this equation can be translated as: “</a:t>
                 </a:r>
                 <a:r>
-                  <a:rPr lang="en-US" b="1" i="1" dirty="0"/>
+                  <a:rPr lang="en-US" sz="2400" b="1" i="1" dirty="0"/>
                   <a:t>Find the scene parameters</a:t>
                 </a:r>
                 <a14:m>
                   <m:oMath xmlns:m="http://schemas.openxmlformats.org/officeDocument/2006/math">
                     <m:r>
-                      <a:rPr lang="en-US" b="1" i="1" smtClean="0">
+                      <a:rPr lang="en-US" sz="2400" b="1" i="1" smtClean="0">
                         <a:latin typeface="Cambria Math" panose="02040503050406030204" pitchFamily="18" charset="0"/>
                       </a:rPr>
                       <m:t> </m:t>
                     </m:r>
                     <m:r>
-                      <a:rPr lang="en-US" b="1" i="1" smtClean="0">
+                      <a:rPr lang="en-US" sz="2400" b="1" i="1" smtClean="0">
                         <a:latin typeface="Cambria Math" panose="02040503050406030204" pitchFamily="18" charset="0"/>
                       </a:rPr>
                       <m:t>𝜽</m:t>
                     </m:r>
                     <m:r>
-                      <a:rPr lang="en-US" b="0" i="1" smtClean="0">
+                      <a:rPr lang="en-US" sz="2400" b="0" i="1" smtClean="0">
                         <a:latin typeface="Cambria Math" panose="02040503050406030204" pitchFamily="18" charset="0"/>
                       </a:rPr>
                       <m:t> </m:t>
@@ -4220,19 +4314,19 @@
                   </m:oMath>
                 </a14:m>
                 <a:r>
-                  <a:rPr lang="en-US" b="1" i="1" dirty="0"/>
+                  <a:rPr lang="en-US" sz="2400" b="1" i="1" dirty="0"/>
                   <a:t>that minimize the average disagreement between the rendered image and the observed photograph, averaged across all</a:t>
                 </a:r>
                 <a14:m>
                   <m:oMath xmlns:m="http://schemas.openxmlformats.org/officeDocument/2006/math">
                     <m:r>
-                      <a:rPr lang="en-US" b="1" i="1" smtClean="0">
+                      <a:rPr lang="en-US" sz="2400" b="1" i="1" smtClean="0">
                         <a:latin typeface="Cambria Math" panose="02040503050406030204" pitchFamily="18" charset="0"/>
                       </a:rPr>
                       <m:t> </m:t>
                     </m:r>
                     <m:r>
-                      <a:rPr lang="en-US" b="1" i="1" smtClean="0">
+                      <a:rPr lang="en-US" sz="2400" b="1" i="1" smtClean="0">
                         <a:latin typeface="Cambria Math" panose="02040503050406030204" pitchFamily="18" charset="0"/>
                       </a:rPr>
                       <m:t>𝑵</m:t>
@@ -4240,13 +4334,243 @@
                   </m:oMath>
                 </a14:m>
                 <a:r>
-                  <a:rPr lang="en-US" b="1" i="1" dirty="0"/>
+                  <a:rPr lang="en-US" sz="2400" b="1" i="1" dirty="0"/>
                   <a:t> training views</a:t>
                 </a:r>
                 <a:r>
-                  <a:rPr lang="en-US" dirty="0"/>
+                  <a:rPr lang="en-US" sz="2400" dirty="0"/>
                   <a:t>”.</a:t>
                 </a:r>
+              </a:p>
+              <a:p>
+                <a:pPr lvl="1">
+                  <a:lnSpc>
+                    <a:spcPct val="110000"/>
+                  </a:lnSpc>
+                </a:pPr>
+                <a14:m>
+                  <m:oMath xmlns:m="http://schemas.openxmlformats.org/officeDocument/2006/math">
+                    <m:r>
+                      <a:rPr lang="en-US" sz="2000" b="1" i="1" smtClean="0">
+                        <a:latin typeface="Cambria Math" panose="02040503050406030204" pitchFamily="18" charset="0"/>
+                      </a:rPr>
+                      <m:t>𝝅</m:t>
+                    </m:r>
+                  </m:oMath>
+                </a14:m>
+                <a:r>
+                  <a:rPr lang="en-US" sz="2000" dirty="0"/>
+                  <a:t> is a camera pose (position and orientation).</a:t>
+                </a:r>
+                <a:endParaRPr lang="en-US" sz="2000" b="1" i="1" dirty="0">
+                  <a:latin typeface="Cambria Math" panose="02040503050406030204" pitchFamily="18" charset="0"/>
+                </a:endParaRPr>
+              </a:p>
+              <a:p>
+                <a:pPr lvl="1">
+                  <a:lnSpc>
+                    <a:spcPct val="110000"/>
+                  </a:lnSpc>
+                </a:pPr>
+                <a14:m>
+                  <m:oMath xmlns:m="http://schemas.openxmlformats.org/officeDocument/2006/math">
+                    <m:sSub>
+                      <m:sSubPr>
+                        <m:ctrlPr>
+                          <a:rPr lang="en-US" sz="2000" b="1" i="1" smtClean="0">
+                            <a:latin typeface="Cambria Math" panose="02040503050406030204" pitchFamily="18" charset="0"/>
+                          </a:rPr>
+                        </m:ctrlPr>
+                      </m:sSubPr>
+                      <m:e>
+                        <m:r>
+                          <a:rPr lang="en-US" sz="2000" b="1" i="1" smtClean="0">
+                            <a:latin typeface="Cambria Math" panose="02040503050406030204" pitchFamily="18" charset="0"/>
+                          </a:rPr>
+                          <m:t>𝑰</m:t>
+                        </m:r>
+                      </m:e>
+                      <m:sub>
+                        <m:r>
+                          <a:rPr lang="en-US" sz="2000" b="1" i="1" smtClean="0">
+                            <a:latin typeface="Cambria Math" panose="02040503050406030204" pitchFamily="18" charset="0"/>
+                          </a:rPr>
+                          <m:t>𝒊</m:t>
+                        </m:r>
+                      </m:sub>
+                    </m:sSub>
+                    <m:r>
+                      <a:rPr lang="en-US" sz="2000" b="1" i="1" smtClean="0">
+                        <a:latin typeface="Cambria Math" panose="02040503050406030204" pitchFamily="18" charset="0"/>
+                      </a:rPr>
+                      <m:t>,</m:t>
+                    </m:r>
+                    <m:r>
+                      <a:rPr lang="en-US" sz="2000" b="1" i="1" smtClean="0">
+                        <a:latin typeface="Cambria Math" panose="02040503050406030204" pitchFamily="18" charset="0"/>
+                      </a:rPr>
+                      <m:t>𝝅</m:t>
+                    </m:r>
+                  </m:oMath>
+                </a14:m>
+                <a:r>
+                  <a:rPr lang="en-US" sz="2000" dirty="0"/>
+                  <a:t> is the training image </a:t>
+                </a:r>
+                <a14:m>
+                  <m:oMath xmlns:m="http://schemas.openxmlformats.org/officeDocument/2006/math">
+                    <m:r>
+                      <a:rPr lang="en-US" sz="2000" b="1" i="1" smtClean="0">
+                        <a:latin typeface="Cambria Math" panose="02040503050406030204" pitchFamily="18" charset="0"/>
+                      </a:rPr>
+                      <m:t>𝒊</m:t>
+                    </m:r>
+                  </m:oMath>
+                </a14:m>
+                <a:r>
+                  <a:rPr lang="en-US" sz="2000" dirty="0"/>
+                  <a:t>, together with the pose of the camera that captured it.</a:t>
+                </a:r>
+              </a:p>
+              <a:p>
+                <a:pPr lvl="1">
+                  <a:lnSpc>
+                    <a:spcPct val="110000"/>
+                  </a:lnSpc>
+                </a:pPr>
+                <a14:m>
+                  <m:oMath xmlns:m="http://schemas.openxmlformats.org/officeDocument/2006/math">
+                    <m:r>
+                      <a:rPr lang="en-US" sz="2000" b="1" i="1" smtClean="0">
+                        <a:latin typeface="Cambria Math" panose="02040503050406030204" pitchFamily="18" charset="0"/>
+                      </a:rPr>
+                      <m:t>𝑹</m:t>
+                    </m:r>
+                    <m:d>
+                      <m:dPr>
+                        <m:ctrlPr>
+                          <a:rPr lang="en-US" sz="2000" b="1" i="1" smtClean="0">
+                            <a:latin typeface="Cambria Math" panose="02040503050406030204" pitchFamily="18" charset="0"/>
+                          </a:rPr>
+                        </m:ctrlPr>
+                      </m:dPr>
+                      <m:e>
+                        <m:r>
+                          <a:rPr lang="en-US" sz="2000" b="1" i="1" smtClean="0">
+                            <a:latin typeface="Cambria Math" panose="02040503050406030204" pitchFamily="18" charset="0"/>
+                          </a:rPr>
+                          <m:t>𝜽</m:t>
+                        </m:r>
+                        <m:r>
+                          <a:rPr lang="en-US" sz="2000" b="1" i="1" smtClean="0">
+                            <a:latin typeface="Cambria Math" panose="02040503050406030204" pitchFamily="18" charset="0"/>
+                          </a:rPr>
+                          <m:t>; </m:t>
+                        </m:r>
+                        <m:sSub>
+                          <m:sSubPr>
+                            <m:ctrlPr>
+                              <a:rPr lang="en-US" sz="2000" b="1" i="1" smtClean="0">
+                                <a:latin typeface="Cambria Math" panose="02040503050406030204" pitchFamily="18" charset="0"/>
+                              </a:rPr>
+                            </m:ctrlPr>
+                          </m:sSubPr>
+                          <m:e>
+                            <m:r>
+                              <a:rPr lang="en-US" sz="2000" b="1" i="1" smtClean="0">
+                                <a:latin typeface="Cambria Math" panose="02040503050406030204" pitchFamily="18" charset="0"/>
+                              </a:rPr>
+                              <m:t>𝝅</m:t>
+                            </m:r>
+                          </m:e>
+                          <m:sub>
+                            <m:r>
+                              <a:rPr lang="en-US" sz="2000" b="1" i="1" smtClean="0">
+                                <a:latin typeface="Cambria Math" panose="02040503050406030204" pitchFamily="18" charset="0"/>
+                              </a:rPr>
+                              <m:t>𝒊</m:t>
+                            </m:r>
+                          </m:sub>
+                        </m:sSub>
+                      </m:e>
+                    </m:d>
+                  </m:oMath>
+                </a14:m>
+                <a:r>
+                  <a:rPr lang="en-US" sz="2000" dirty="0"/>
+                  <a:t> is the rendering operator, using the current scene parameters </a:t>
+                </a:r>
+                <a14:m>
+                  <m:oMath xmlns:m="http://schemas.openxmlformats.org/officeDocument/2006/math">
+                    <m:r>
+                      <a:rPr lang="en-US" sz="2000" b="1" i="1" smtClean="0">
+                        <a:latin typeface="Cambria Math" panose="02040503050406030204" pitchFamily="18" charset="0"/>
+                      </a:rPr>
+                      <m:t>𝜽</m:t>
+                    </m:r>
+                  </m:oMath>
+                </a14:m>
+                <a:r>
+                  <a:rPr lang="en-US" sz="2000" dirty="0"/>
+                  <a:t>, asked to render </a:t>
+                </a:r>
+                <a:r>
+                  <a:rPr lang="en-US" sz="2000" i="1" dirty="0"/>
+                  <a:t>what the scene would look like from camera pose</a:t>
+                </a:r>
+                <a:r>
+                  <a:rPr lang="en-US" sz="2000" dirty="0"/>
+                  <a:t> </a:t>
+                </a:r>
+                <a14:m>
+                  <m:oMath xmlns:m="http://schemas.openxmlformats.org/officeDocument/2006/math">
+                    <m:sSub>
+                      <m:sSubPr>
+                        <m:ctrlPr>
+                          <a:rPr lang="en-US" sz="2000" b="1" i="1" smtClean="0">
+                            <a:latin typeface="Cambria Math" panose="02040503050406030204" pitchFamily="18" charset="0"/>
+                          </a:rPr>
+                        </m:ctrlPr>
+                      </m:sSubPr>
+                      <m:e>
+                        <m:r>
+                          <a:rPr lang="en-US" sz="2000" b="1" i="1" smtClean="0">
+                            <a:latin typeface="Cambria Math" panose="02040503050406030204" pitchFamily="18" charset="0"/>
+                          </a:rPr>
+                          <m:t>𝝅</m:t>
+                        </m:r>
+                      </m:e>
+                      <m:sub>
+                        <m:r>
+                          <a:rPr lang="en-US" sz="2000" b="1" i="1" smtClean="0">
+                            <a:latin typeface="Cambria Math" panose="02040503050406030204" pitchFamily="18" charset="0"/>
+                          </a:rPr>
+                          <m:t>𝒊</m:t>
+                        </m:r>
+                      </m:sub>
+                    </m:sSub>
+                  </m:oMath>
+                </a14:m>
+                <a:r>
+                  <a:rPr lang="en-US" sz="2000" dirty="0"/>
+                  <a:t>.</a:t>
+                </a:r>
+              </a:p>
+              <a:p>
+                <a:pPr lvl="1">
+                  <a:lnSpc>
+                    <a:spcPct val="100000"/>
+                  </a:lnSpc>
+                </a:pPr>
+                <a:endParaRPr lang="en-US" sz="2000" dirty="0"/>
+              </a:p>
+              <a:p>
+                <a:pPr lvl="1">
+                  <a:lnSpc>
+                    <a:spcPct val="100000"/>
+                  </a:lnSpc>
+                </a:pPr>
+                <a:endParaRPr lang="en-US" sz="2000" dirty="0"/>
               </a:p>
             </p:txBody>
           </p:sp>
@@ -4271,12 +4595,12 @@
             <p:spPr>
               <a:xfrm>
                 <a:off x="838200" y="1825624"/>
-                <a:ext cx="10884694" cy="4546601"/>
+                <a:ext cx="10884694" cy="4875214"/>
               </a:xfrm>
               <a:blipFill>
                 <a:blip r:embed="rId2"/>
                 <a:stretch>
-                  <a:fillRect l="-1008" t="-1340"/>
+                  <a:fillRect l="-1008" t="-2125" b="-625"/>
                 </a:stretch>
               </a:blipFill>
             </p:spPr>
@@ -4309,6 +4633,220 @@
 </file>
 
 <file path=ppt/slides/slide4.xml><?xml version="1.0" encoding="utf-8"?>
+<p:sld xmlns:a="http://schemas.openxmlformats.org/drawingml/2006/main" xmlns:r="http://schemas.openxmlformats.org/officeDocument/2006/relationships" xmlns:p="http://schemas.openxmlformats.org/presentationml/2006/main">
+  <p:cSld>
+    <p:spTree>
+      <p:nvGrpSpPr>
+        <p:cNvPr id="1" name=""/>
+        <p:cNvGrpSpPr/>
+        <p:nvPr/>
+      </p:nvGrpSpPr>
+      <p:grpSpPr>
+        <a:xfrm>
+          <a:off x="0" y="0"/>
+          <a:ext cx="0" cy="0"/>
+          <a:chOff x="0" y="0"/>
+          <a:chExt cx="0" cy="0"/>
+        </a:xfrm>
+      </p:grpSpPr>
+      <p:sp>
+        <p:nvSpPr>
+          <p:cNvPr id="2" name="Title 1">
+            <a:extLst>
+              <a:ext uri="{FF2B5EF4-FFF2-40B4-BE49-F238E27FC236}">
+                <a16:creationId xmlns:a16="http://schemas.microsoft.com/office/drawing/2014/main" id="{8C110E5F-AA02-FF09-38AC-558DFE931E96}"/>
+              </a:ext>
+            </a:extLst>
+          </p:cNvPr>
+          <p:cNvSpPr>
+            <a:spLocks noGrp="1"/>
+          </p:cNvSpPr>
+          <p:nvPr>
+            <p:ph type="title"/>
+          </p:nvPr>
+        </p:nvSpPr>
+        <p:spPr/>
+        <p:txBody>
+          <a:bodyPr/>
+          <a:lstStyle/>
+          <a:p>
+            <a:r>
+              <a:rPr lang="en-US" dirty="0"/>
+              <a:t>NeRF (Neural Radiance Fields)</a:t>
+            </a:r>
+          </a:p>
+        </p:txBody>
+      </p:sp>
+      <p:sp>
+        <p:nvSpPr>
+          <p:cNvPr id="3" name="Content Placeholder 2">
+            <a:extLst>
+              <a:ext uri="{FF2B5EF4-FFF2-40B4-BE49-F238E27FC236}">
+                <a16:creationId xmlns:a16="http://schemas.microsoft.com/office/drawing/2014/main" id="{119442EC-01CD-AEFC-242D-216F0443E0D5}"/>
+              </a:ext>
+            </a:extLst>
+          </p:cNvPr>
+          <p:cNvSpPr>
+            <a:spLocks noGrp="1"/>
+          </p:cNvSpPr>
+          <p:nvPr>
+            <p:ph idx="1"/>
+          </p:nvPr>
+        </p:nvSpPr>
+        <p:spPr>
+          <a:xfrm>
+            <a:off x="838199" y="1825625"/>
+            <a:ext cx="10942121" cy="4667250"/>
+          </a:xfrm>
+        </p:spPr>
+        <p:txBody>
+          <a:bodyPr/>
+          <a:lstStyle/>
+          <a:p>
+            <a:pPr>
+              <a:lnSpc>
+                <a:spcPct val="100000"/>
+              </a:lnSpc>
+            </a:pPr>
+            <a:r>
+              <a:rPr lang="en-US" dirty="0"/>
+              <a:t>A scene reconstruction method that represents a 3D scene as a small multi-layer perceptron mapping any 3D point and viewing direction to a density and color.</a:t>
+            </a:r>
+          </a:p>
+          <a:p>
+            <a:pPr>
+              <a:lnSpc>
+                <a:spcPct val="100000"/>
+              </a:lnSpc>
+            </a:pPr>
+            <a:r>
+              <a:rPr lang="en-US" dirty="0"/>
+              <a:t>The scene parameters are the MLP weights, and they are fitted by gradient descent through a differentiable volume-rendering operator that composites samples along each pixel ray into the final image.</a:t>
+            </a:r>
+          </a:p>
+        </p:txBody>
+      </p:sp>
+    </p:spTree>
+    <p:extLst>
+      <p:ext uri="{BB962C8B-B14F-4D97-AF65-F5344CB8AC3E}">
+        <p14:creationId xmlns:p14="http://schemas.microsoft.com/office/powerpoint/2010/main" val="691362837"/>
+      </p:ext>
+    </p:extLst>
+  </p:cSld>
+  <p:clrMapOvr>
+    <a:masterClrMapping/>
+  </p:clrMapOvr>
+</p:sld>
+</file>
+
+<file path=ppt/slides/slide5.xml><?xml version="1.0" encoding="utf-8"?>
+<p:sld xmlns:a="http://schemas.openxmlformats.org/drawingml/2006/main" xmlns:r="http://schemas.openxmlformats.org/officeDocument/2006/relationships" xmlns:p="http://schemas.openxmlformats.org/presentationml/2006/main">
+  <p:cSld>
+    <p:spTree>
+      <p:nvGrpSpPr>
+        <p:cNvPr id="1" name=""/>
+        <p:cNvGrpSpPr/>
+        <p:nvPr/>
+      </p:nvGrpSpPr>
+      <p:grpSpPr>
+        <a:xfrm>
+          <a:off x="0" y="0"/>
+          <a:ext cx="0" cy="0"/>
+          <a:chOff x="0" y="0"/>
+          <a:chExt cx="0" cy="0"/>
+        </a:xfrm>
+      </p:grpSpPr>
+      <p:sp>
+        <p:nvSpPr>
+          <p:cNvPr id="2" name="Title 1">
+            <a:extLst>
+              <a:ext uri="{FF2B5EF4-FFF2-40B4-BE49-F238E27FC236}">
+                <a16:creationId xmlns:a16="http://schemas.microsoft.com/office/drawing/2014/main" id="{71463E8B-9E8F-886F-2EFE-718087FC56B4}"/>
+              </a:ext>
+            </a:extLst>
+          </p:cNvPr>
+          <p:cNvSpPr>
+            <a:spLocks noGrp="1"/>
+          </p:cNvSpPr>
+          <p:nvPr>
+            <p:ph type="title"/>
+          </p:nvPr>
+        </p:nvSpPr>
+        <p:spPr/>
+        <p:txBody>
+          <a:bodyPr/>
+          <a:lstStyle/>
+          <a:p>
+            <a:r>
+              <a:rPr lang="en-US" dirty="0"/>
+              <a:t>3D Gaussian Splatting</a:t>
+            </a:r>
+          </a:p>
+        </p:txBody>
+      </p:sp>
+      <p:sp>
+        <p:nvSpPr>
+          <p:cNvPr id="3" name="Content Placeholder 2">
+            <a:extLst>
+              <a:ext uri="{FF2B5EF4-FFF2-40B4-BE49-F238E27FC236}">
+                <a16:creationId xmlns:a16="http://schemas.microsoft.com/office/drawing/2014/main" id="{45E916F1-B8BB-0B18-645C-232DE03DEA77}"/>
+              </a:ext>
+            </a:extLst>
+          </p:cNvPr>
+          <p:cNvSpPr>
+            <a:spLocks noGrp="1"/>
+          </p:cNvSpPr>
+          <p:nvPr>
+            <p:ph idx="1"/>
+          </p:nvPr>
+        </p:nvSpPr>
+        <p:spPr>
+          <a:xfrm>
+            <a:off x="838199" y="1825624"/>
+            <a:ext cx="10942121" cy="4575175"/>
+          </a:xfrm>
+        </p:spPr>
+        <p:txBody>
+          <a:bodyPr/>
+          <a:lstStyle/>
+          <a:p>
+            <a:pPr>
+              <a:lnSpc>
+                <a:spcPct val="100000"/>
+              </a:lnSpc>
+            </a:pPr>
+            <a:r>
+              <a:rPr lang="en-US" dirty="0"/>
+              <a:t>A scene reconstruction method that represents a 3D scene as an explicit collection of 3D Gaussian primitives, each carrying a position, scale, rotation, opacity, and color.</a:t>
+            </a:r>
+          </a:p>
+          <a:p>
+            <a:pPr>
+              <a:lnSpc>
+                <a:spcPct val="100000"/>
+              </a:lnSpc>
+            </a:pPr>
+            <a:r>
+              <a:rPr lang="en-US" dirty="0"/>
+              <a:t>The scene parameters are the per-Gaussian tuples, and they are fitted by gradient descent through a differentiable tile-based rasterizer that projects and alpha-composites the primitives into the final image.</a:t>
+            </a:r>
+          </a:p>
+        </p:txBody>
+      </p:sp>
+    </p:spTree>
+    <p:extLst>
+      <p:ext uri="{BB962C8B-B14F-4D97-AF65-F5344CB8AC3E}">
+        <p14:creationId xmlns:p14="http://schemas.microsoft.com/office/powerpoint/2010/main" val="1061477257"/>
+      </p:ext>
+    </p:extLst>
+  </p:cSld>
+  <p:clrMapOvr>
+    <a:masterClrMapping/>
+  </p:clrMapOvr>
+</p:sld>
+</file>
+
+<file path=ppt/slides/slide6.xml><?xml version="1.0" encoding="utf-8"?>
 <p:sld xmlns:a="http://schemas.openxmlformats.org/drawingml/2006/main" xmlns:r="http://schemas.openxmlformats.org/officeDocument/2006/relationships" xmlns:p="http://schemas.openxmlformats.org/presentationml/2006/main">
   <p:cSld>
     <p:spTree>
@@ -4754,7 +5292,7 @@
 </p:sld>
 </file>
 
-<file path=ppt/slides/slide5.xml><?xml version="1.0" encoding="utf-8"?>
+<file path=ppt/slides/slide7.xml><?xml version="1.0" encoding="utf-8"?>
 <p:sld xmlns:a="http://schemas.openxmlformats.org/drawingml/2006/main" xmlns:r="http://schemas.openxmlformats.org/officeDocument/2006/relationships" xmlns:p="http://schemas.openxmlformats.org/presentationml/2006/main">
   <p:cSld>
     <p:spTree>
@@ -4771,150 +5309,314 @@
           <a:chExt cx="0" cy="0"/>
         </a:xfrm>
       </p:grpSpPr>
-      <p:sp>
-        <p:nvSpPr>
-          <p:cNvPr id="2" name="Title 1">
-            <a:extLst>
-              <a:ext uri="{FF2B5EF4-FFF2-40B4-BE49-F238E27FC236}">
-                <a16:creationId xmlns:a16="http://schemas.microsoft.com/office/drawing/2014/main" id="{AE521544-421E-A3F7-7F55-09C6C7F1EF43}"/>
-              </a:ext>
-            </a:extLst>
-          </p:cNvPr>
-          <p:cNvSpPr>
-            <a:spLocks noGrp="1"/>
-          </p:cNvSpPr>
-          <p:nvPr>
-            <p:ph type="title"/>
-          </p:nvPr>
-        </p:nvSpPr>
-        <p:spPr/>
-        <p:txBody>
-          <a:bodyPr/>
-          <a:lstStyle/>
-          <a:p>
-            <a:r>
-              <a:rPr lang="en-US" dirty="0"/>
-              <a:t>Optimizers</a:t>
-            </a:r>
-          </a:p>
-        </p:txBody>
-      </p:sp>
-      <p:sp>
-        <p:nvSpPr>
-          <p:cNvPr id="3" name="Content Placeholder 2">
-            <a:extLst>
-              <a:ext uri="{FF2B5EF4-FFF2-40B4-BE49-F238E27FC236}">
-                <a16:creationId xmlns:a16="http://schemas.microsoft.com/office/drawing/2014/main" id="{FD7556D3-4BF0-3C08-0EEA-14321B15A7E4}"/>
-              </a:ext>
-            </a:extLst>
-          </p:cNvPr>
-          <p:cNvSpPr>
-            <a:spLocks noGrp="1"/>
-          </p:cNvSpPr>
-          <p:nvPr>
-            <p:ph idx="1"/>
-          </p:nvPr>
-        </p:nvSpPr>
-        <p:spPr>
-          <a:xfrm>
-            <a:off x="838200" y="1825625"/>
-            <a:ext cx="10927556" cy="4667250"/>
-          </a:xfrm>
-        </p:spPr>
-        <p:txBody>
-          <a:bodyPr>
-            <a:normAutofit fontScale="77500" lnSpcReduction="20000"/>
-          </a:bodyPr>
-          <a:lstStyle/>
-          <a:p>
-            <a:pPr>
-              <a:lnSpc>
-                <a:spcPts val="2640"/>
-              </a:lnSpc>
-            </a:pPr>
-            <a:r>
-              <a:rPr lang="en-US" b="1" dirty="0"/>
-              <a:t>SGD</a:t>
-            </a:r>
-            <a:r>
-              <a:rPr lang="en-US" dirty="0"/>
-              <a:t> - Step in the direction of the negative gradient, with a fixed learning rate (simplest possible recipe).</a:t>
-            </a:r>
-          </a:p>
-          <a:p>
-            <a:pPr>
-              <a:lnSpc>
-                <a:spcPts val="2640"/>
-              </a:lnSpc>
-            </a:pPr>
-            <a:r>
-              <a:rPr lang="en-US" b="1" dirty="0"/>
-              <a:t>SGD with momentum</a:t>
-            </a:r>
-            <a:r>
-              <a:rPr lang="en-US" dirty="0"/>
-              <a:t> - Keep a running average of past gradients and step in that smoothed direction, which dampens noise and accelerates along consistent descent directions.</a:t>
-            </a:r>
-          </a:p>
-          <a:p>
-            <a:pPr>
-              <a:lnSpc>
-                <a:spcPts val="2640"/>
-              </a:lnSpc>
-            </a:pPr>
-            <a:r>
-              <a:rPr lang="en-US" b="1" dirty="0"/>
-              <a:t>SGD with Nesterov</a:t>
-            </a:r>
-            <a:r>
-              <a:rPr lang="en-US" dirty="0"/>
-              <a:t> - A variant of momentum that "looks ahead" before taking the step, giving slightly better convergence on convex problems.</a:t>
-            </a:r>
-          </a:p>
-          <a:p>
-            <a:pPr>
-              <a:lnSpc>
-                <a:spcPts val="2640"/>
-              </a:lnSpc>
-            </a:pPr>
-            <a:r>
-              <a:rPr lang="en-US" b="1" dirty="0"/>
-              <a:t>Adam</a:t>
-            </a:r>
-            <a:r>
-              <a:rPr lang="en-US" dirty="0"/>
-              <a:t> - Keep a running average of past gradients </a:t>
-            </a:r>
-            <a:r>
-              <a:rPr lang="en-US" i="1" dirty="0"/>
-              <a:t>and</a:t>
-            </a:r>
-            <a:r>
-              <a:rPr lang="en-US" dirty="0"/>
-              <a:t> a running average of past squared gradients, then divide the smoothed gradient by the smoothed magnitude. The effect is a per-parameter adaptive learning rate.</a:t>
-            </a:r>
-          </a:p>
-          <a:p>
-            <a:pPr>
-              <a:lnSpc>
-                <a:spcPts val="2640"/>
-              </a:lnSpc>
-            </a:pPr>
-            <a:r>
-              <a:rPr lang="en-US" b="1" dirty="0"/>
-              <a:t>AdamW</a:t>
-            </a:r>
-            <a:r>
-              <a:rPr lang="en-US" dirty="0"/>
-              <a:t>: Same as Adam, but with weight decay applied as a separate term outside the adaptive scaling, which fixes a subtle interaction in the original Adam formulation.</a:t>
-            </a:r>
-          </a:p>
-        </p:txBody>
-      </p:sp>
+      <mc:AlternateContent xmlns:mc="http://schemas.openxmlformats.org/markup-compatibility/2006">
+        <mc:Choice xmlns:a14="http://schemas.microsoft.com/office/drawing/2010/main" Requires="a14">
+          <p:sp>
+            <p:nvSpPr>
+              <p:cNvPr id="2" name="Title 1">
+                <a:extLst>
+                  <a:ext uri="{FF2B5EF4-FFF2-40B4-BE49-F238E27FC236}">
+                    <a16:creationId xmlns:a16="http://schemas.microsoft.com/office/drawing/2014/main" id="{93C49FB7-E860-8C23-9933-52A219E7B3D8}"/>
+                  </a:ext>
+                </a:extLst>
+              </p:cNvPr>
+              <p:cNvSpPr>
+                <a:spLocks noGrp="1"/>
+              </p:cNvSpPr>
+              <p:nvPr>
+                <p:ph type="title"/>
+              </p:nvPr>
+            </p:nvSpPr>
+            <p:spPr/>
+            <p:txBody>
+              <a:bodyPr/>
+              <a:lstStyle/>
+              <a:p>
+                <a14:m>
+                  <m:oMath xmlns:m="http://schemas.openxmlformats.org/officeDocument/2006/math">
+                    <m:r>
+                      <a:rPr lang="en-US" b="1" i="1" smtClean="0">
+                        <a:latin typeface="Cambria Math" panose="02040503050406030204" pitchFamily="18" charset="0"/>
+                      </a:rPr>
+                      <m:t>𝑹</m:t>
+                    </m:r>
+                  </m:oMath>
+                </a14:m>
+                <a:r>
+                  <a:rPr lang="en-US" dirty="0"/>
+                  <a:t>, The Rendering Operator (1/2)</a:t>
+                </a:r>
+              </a:p>
+            </p:txBody>
+          </p:sp>
+        </mc:Choice>
+        <mc:Fallback>
+          <p:sp>
+            <p:nvSpPr>
+              <p:cNvPr id="2" name="Title 1">
+                <a:extLst>
+                  <a:ext uri="{FF2B5EF4-FFF2-40B4-BE49-F238E27FC236}">
+                    <a16:creationId xmlns:a16="http://schemas.microsoft.com/office/drawing/2014/main" id="{93C49FB7-E860-8C23-9933-52A219E7B3D8}"/>
+                  </a:ext>
+                </a:extLst>
+              </p:cNvPr>
+              <p:cNvSpPr>
+                <a:spLocks noGrp="1" noRot="1" noChangeAspect="1" noMove="1" noResize="1" noEditPoints="1" noAdjustHandles="1" noChangeArrowheads="1" noChangeShapeType="1" noTextEdit="1"/>
+              </p:cNvSpPr>
+              <p:nvPr>
+                <p:ph type="title"/>
+              </p:nvPr>
+            </p:nvSpPr>
+            <p:spPr>
+              <a:blipFill>
+                <a:blip r:embed="rId2"/>
+                <a:stretch>
+                  <a:fillRect/>
+                </a:stretch>
+              </a:blipFill>
+            </p:spPr>
+            <p:txBody>
+              <a:bodyPr/>
+              <a:lstStyle/>
+              <a:p>
+                <a:r>
+                  <a:rPr lang="en-US">
+                    <a:noFill/>
+                  </a:rPr>
+                  <a:t> </a:t>
+                </a:r>
+              </a:p>
+            </p:txBody>
+          </p:sp>
+        </mc:Fallback>
+      </mc:AlternateContent>
+      <mc:AlternateContent xmlns:mc="http://schemas.openxmlformats.org/markup-compatibility/2006">
+        <mc:Choice xmlns:a14="http://schemas.microsoft.com/office/drawing/2010/main" Requires="a14">
+          <p:sp>
+            <p:nvSpPr>
+              <p:cNvPr id="3" name="Content Placeholder 2">
+                <a:extLst>
+                  <a:ext uri="{FF2B5EF4-FFF2-40B4-BE49-F238E27FC236}">
+                    <a16:creationId xmlns:a16="http://schemas.microsoft.com/office/drawing/2014/main" id="{2A29CD49-E0CE-BAA1-92A0-3376B980C534}"/>
+                  </a:ext>
+                </a:extLst>
+              </p:cNvPr>
+              <p:cNvSpPr>
+                <a:spLocks noGrp="1"/>
+              </p:cNvSpPr>
+              <p:nvPr>
+                <p:ph idx="1"/>
+              </p:nvPr>
+            </p:nvSpPr>
+            <p:spPr>
+              <a:xfrm>
+                <a:off x="838199" y="1825625"/>
+                <a:ext cx="10942121" cy="4667250"/>
+              </a:xfrm>
+            </p:spPr>
+            <p:txBody>
+              <a:bodyPr>
+                <a:normAutofit/>
+              </a:bodyPr>
+              <a:lstStyle/>
+              <a:p>
+                <a:pPr>
+                  <a:lnSpc>
+                    <a:spcPct val="100000"/>
+                  </a:lnSpc>
+                </a:pPr>
+                <a:r>
+                  <a:rPr lang="en-US" dirty="0"/>
+                  <a:t>For </a:t>
+                </a:r>
+                <a:r>
+                  <a:rPr lang="en-US" b="1" dirty="0"/>
+                  <a:t>NeRF</a:t>
+                </a:r>
+                <a:r>
+                  <a:rPr lang="en-US" dirty="0"/>
+                  <a:t>, the rendering operator is the </a:t>
+                </a:r>
+                <a:r>
+                  <a:rPr lang="en-US" b="1" dirty="0"/>
+                  <a:t>volume-rendering pipeline</a:t>
+                </a:r>
+                <a:r>
+                  <a:rPr lang="en-US" dirty="0"/>
+                  <a:t>. Inside </a:t>
+                </a:r>
+                <a14:m>
+                  <m:oMath xmlns:m="http://schemas.openxmlformats.org/officeDocument/2006/math">
+                    <m:r>
+                      <a:rPr lang="en-US" b="1" i="1" smtClean="0">
+                        <a:latin typeface="Cambria Math" panose="02040503050406030204" pitchFamily="18" charset="0"/>
+                      </a:rPr>
+                      <m:t>𝑹</m:t>
+                    </m:r>
+                  </m:oMath>
+                </a14:m>
+                <a:r>
+                  <a:rPr lang="en-US" dirty="0"/>
+                  <a:t>, the following happens for each output pixel:</a:t>
+                </a:r>
+              </a:p>
+              <a:p>
+                <a:pPr marL="822960" lvl="1" indent="-365760">
+                  <a:lnSpc>
+                    <a:spcPct val="100000"/>
+                  </a:lnSpc>
+                  <a:buFont typeface="+mj-lt"/>
+                  <a:buAutoNum type="arabicPeriod"/>
+                </a:pPr>
+                <a:r>
+                  <a:rPr lang="en-US" dirty="0"/>
+                  <a:t>Cast a ray from the camera through that pixel into the scene.</a:t>
+                </a:r>
+              </a:p>
+              <a:p>
+                <a:pPr marL="822960" lvl="1" indent="-365760">
+                  <a:lnSpc>
+                    <a:spcPct val="100000"/>
+                  </a:lnSpc>
+                  <a:buFont typeface="+mj-lt"/>
+                  <a:buAutoNum type="arabicPeriod"/>
+                </a:pPr>
+                <a:r>
+                  <a:rPr lang="en-US" dirty="0"/>
+                  <a:t>Sample many 3D points along that ray.</a:t>
+                </a:r>
+              </a:p>
+              <a:p>
+                <a:pPr marL="822960" lvl="1" indent="-365760">
+                  <a:lnSpc>
+                    <a:spcPct val="100000"/>
+                  </a:lnSpc>
+                  <a:buFont typeface="+mj-lt"/>
+                  <a:buAutoNum type="arabicPeriod"/>
+                </a:pPr>
+                <a:r>
+                  <a:rPr lang="en-US" dirty="0"/>
+                  <a:t>At each sample point, query the MLP </a:t>
+                </a:r>
+                <a14:m>
+                  <m:oMath xmlns:m="http://schemas.openxmlformats.org/officeDocument/2006/math">
+                    <m:sSub>
+                      <m:sSubPr>
+                        <m:ctrlPr>
+                          <a:rPr lang="en-US" b="1" i="1" smtClean="0">
+                            <a:latin typeface="Cambria Math" panose="02040503050406030204" pitchFamily="18" charset="0"/>
+                          </a:rPr>
+                        </m:ctrlPr>
+                      </m:sSubPr>
+                      <m:e>
+                        <m:r>
+                          <a:rPr lang="en-US" b="1" i="1" smtClean="0">
+                            <a:latin typeface="Cambria Math" panose="02040503050406030204" pitchFamily="18" charset="0"/>
+                          </a:rPr>
+                          <m:t>𝒇</m:t>
+                        </m:r>
+                      </m:e>
+                      <m:sub>
+                        <m:r>
+                          <a:rPr lang="en-US" b="1" i="1" smtClean="0">
+                            <a:latin typeface="Cambria Math" panose="02040503050406030204" pitchFamily="18" charset="0"/>
+                          </a:rPr>
+                          <m:t>𝜽</m:t>
+                        </m:r>
+                      </m:sub>
+                    </m:sSub>
+                  </m:oMath>
+                </a14:m>
+                <a:r>
+                  <a:rPr lang="en-US" dirty="0"/>
+                  <a:t> to get a density and an RGB color at that 3D location.</a:t>
+                </a:r>
+              </a:p>
+              <a:p>
+                <a:pPr marL="822960" lvl="1" indent="-365760">
+                  <a:lnSpc>
+                    <a:spcPct val="100000"/>
+                  </a:lnSpc>
+                  <a:buFont typeface="+mj-lt"/>
+                  <a:buAutoNum type="arabicPeriod"/>
+                </a:pPr>
+                <a:r>
+                  <a:rPr lang="en-US" dirty="0"/>
+                  <a:t>Combine those samples using the volume-rendering integral (a weighted sum that says "</a:t>
+                </a:r>
+                <a:r>
+                  <a:rPr lang="en-US" i="1" dirty="0"/>
+                  <a:t>the closer to the camera and the more opaque, the more this sample contributes to the final pixel</a:t>
+                </a:r>
+                <a:r>
+                  <a:rPr lang="en-US" dirty="0"/>
+                  <a:t>").</a:t>
+                </a:r>
+              </a:p>
+              <a:p>
+                <a:pPr marL="822960" lvl="1" indent="-365760">
+                  <a:lnSpc>
+                    <a:spcPct val="100000"/>
+                  </a:lnSpc>
+                  <a:buFont typeface="+mj-lt"/>
+                  <a:buAutoNum type="arabicPeriod"/>
+                </a:pPr>
+                <a:r>
+                  <a:rPr lang="en-US" dirty="0"/>
+                  <a:t>Out pops one pixel color.</a:t>
+                </a:r>
+              </a:p>
+            </p:txBody>
+          </p:sp>
+        </mc:Choice>
+        <mc:Fallback>
+          <p:sp>
+            <p:nvSpPr>
+              <p:cNvPr id="3" name="Content Placeholder 2">
+                <a:extLst>
+                  <a:ext uri="{FF2B5EF4-FFF2-40B4-BE49-F238E27FC236}">
+                    <a16:creationId xmlns:a16="http://schemas.microsoft.com/office/drawing/2014/main" id="{2A29CD49-E0CE-BAA1-92A0-3376B980C534}"/>
+                  </a:ext>
+                </a:extLst>
+              </p:cNvPr>
+              <p:cNvSpPr>
+                <a:spLocks noGrp="1" noRot="1" noChangeAspect="1" noMove="1" noResize="1" noEditPoints="1" noAdjustHandles="1" noChangeArrowheads="1" noChangeShapeType="1" noTextEdit="1"/>
+              </p:cNvSpPr>
+              <p:nvPr>
+                <p:ph idx="1"/>
+              </p:nvPr>
+            </p:nvSpPr>
+            <p:spPr>
+              <a:xfrm>
+                <a:off x="838199" y="1825625"/>
+                <a:ext cx="10942121" cy="4667250"/>
+              </a:xfrm>
+              <a:blipFill>
+                <a:blip r:embed="rId3"/>
+                <a:stretch>
+                  <a:fillRect l="-947" t="-1305" r="-1058"/>
+                </a:stretch>
+              </a:blipFill>
+            </p:spPr>
+            <p:txBody>
+              <a:bodyPr/>
+              <a:lstStyle/>
+              <a:p>
+                <a:r>
+                  <a:rPr lang="en-US">
+                    <a:noFill/>
+                  </a:rPr>
+                  <a:t> </a:t>
+                </a:r>
+              </a:p>
+            </p:txBody>
+          </p:sp>
+        </mc:Fallback>
+      </mc:AlternateContent>
     </p:spTree>
     <p:extLst>
       <p:ext uri="{BB962C8B-B14F-4D97-AF65-F5344CB8AC3E}">
-        <p14:creationId xmlns:p14="http://schemas.microsoft.com/office/powerpoint/2010/main" val="3673883911"/>
+        <p14:creationId xmlns:p14="http://schemas.microsoft.com/office/powerpoint/2010/main" val="151076082"/>
       </p:ext>
     </p:extLst>
   </p:cSld>
@@ -4924,7 +5626,320 @@
 </p:sld>
 </file>
 
-<file path=ppt/slides/slide6.xml><?xml version="1.0" encoding="utf-8"?>
+<file path=ppt/slides/slide8.xml><?xml version="1.0" encoding="utf-8"?>
+<p:sld xmlns:a="http://schemas.openxmlformats.org/drawingml/2006/main" xmlns:r="http://schemas.openxmlformats.org/officeDocument/2006/relationships" xmlns:p="http://schemas.openxmlformats.org/presentationml/2006/main">
+  <p:cSld>
+    <p:spTree>
+      <p:nvGrpSpPr>
+        <p:cNvPr id="1" name="">
+          <a:extLst>
+            <a:ext uri="{FF2B5EF4-FFF2-40B4-BE49-F238E27FC236}">
+              <a16:creationId xmlns:a16="http://schemas.microsoft.com/office/drawing/2014/main" id="{42DC28AD-A325-026E-9DF2-3428E122912B}"/>
+            </a:ext>
+          </a:extLst>
+        </p:cNvPr>
+        <p:cNvGrpSpPr/>
+        <p:nvPr/>
+      </p:nvGrpSpPr>
+      <p:grpSpPr>
+        <a:xfrm>
+          <a:off x="0" y="0"/>
+          <a:ext cx="0" cy="0"/>
+          <a:chOff x="0" y="0"/>
+          <a:chExt cx="0" cy="0"/>
+        </a:xfrm>
+      </p:grpSpPr>
+      <mc:AlternateContent xmlns:mc="http://schemas.openxmlformats.org/markup-compatibility/2006">
+        <mc:Choice xmlns:a14="http://schemas.microsoft.com/office/drawing/2010/main" Requires="a14">
+          <p:sp>
+            <p:nvSpPr>
+              <p:cNvPr id="2" name="Title 1">
+                <a:extLst>
+                  <a:ext uri="{FF2B5EF4-FFF2-40B4-BE49-F238E27FC236}">
+                    <a16:creationId xmlns:a16="http://schemas.microsoft.com/office/drawing/2014/main" id="{157528D8-897C-6DD2-9FD8-4FCD63109D3E}"/>
+                  </a:ext>
+                </a:extLst>
+              </p:cNvPr>
+              <p:cNvSpPr>
+                <a:spLocks noGrp="1"/>
+              </p:cNvSpPr>
+              <p:nvPr>
+                <p:ph type="title"/>
+              </p:nvPr>
+            </p:nvSpPr>
+            <p:spPr/>
+            <p:txBody>
+              <a:bodyPr/>
+              <a:lstStyle/>
+              <a:p>
+                <a14:m>
+                  <m:oMath xmlns:m="http://schemas.openxmlformats.org/officeDocument/2006/math">
+                    <m:r>
+                      <a:rPr lang="en-US" b="1" i="1" smtClean="0">
+                        <a:latin typeface="Cambria Math" panose="02040503050406030204" pitchFamily="18" charset="0"/>
+                      </a:rPr>
+                      <m:t>𝑹</m:t>
+                    </m:r>
+                  </m:oMath>
+                </a14:m>
+                <a:r>
+                  <a:rPr lang="en-US" dirty="0"/>
+                  <a:t>, The Rendering Operator (2/2)</a:t>
+                </a:r>
+              </a:p>
+            </p:txBody>
+          </p:sp>
+        </mc:Choice>
+        <mc:Fallback>
+          <p:sp>
+            <p:nvSpPr>
+              <p:cNvPr id="2" name="Title 1">
+                <a:extLst>
+                  <a:ext uri="{FF2B5EF4-FFF2-40B4-BE49-F238E27FC236}">
+                    <a16:creationId xmlns:a16="http://schemas.microsoft.com/office/drawing/2014/main" id="{157528D8-897C-6DD2-9FD8-4FCD63109D3E}"/>
+                  </a:ext>
+                </a:extLst>
+              </p:cNvPr>
+              <p:cNvSpPr>
+                <a:spLocks noGrp="1" noRot="1" noChangeAspect="1" noMove="1" noResize="1" noEditPoints="1" noAdjustHandles="1" noChangeArrowheads="1" noChangeShapeType="1" noTextEdit="1"/>
+              </p:cNvSpPr>
+              <p:nvPr>
+                <p:ph type="title"/>
+              </p:nvPr>
+            </p:nvSpPr>
+            <p:spPr>
+              <a:blipFill>
+                <a:blip r:embed="rId2"/>
+                <a:stretch>
+                  <a:fillRect/>
+                </a:stretch>
+              </a:blipFill>
+            </p:spPr>
+            <p:txBody>
+              <a:bodyPr/>
+              <a:lstStyle/>
+              <a:p>
+                <a:r>
+                  <a:rPr lang="en-US">
+                    <a:noFill/>
+                  </a:rPr>
+                  <a:t> </a:t>
+                </a:r>
+              </a:p>
+            </p:txBody>
+          </p:sp>
+        </mc:Fallback>
+      </mc:AlternateContent>
+      <mc:AlternateContent xmlns:mc="http://schemas.openxmlformats.org/markup-compatibility/2006">
+        <mc:Choice xmlns:a14="http://schemas.microsoft.com/office/drawing/2010/main" Requires="a14">
+          <p:sp>
+            <p:nvSpPr>
+              <p:cNvPr id="3" name="Content Placeholder 2">
+                <a:extLst>
+                  <a:ext uri="{FF2B5EF4-FFF2-40B4-BE49-F238E27FC236}">
+                    <a16:creationId xmlns:a16="http://schemas.microsoft.com/office/drawing/2014/main" id="{415F3940-DE7A-D23A-DDCB-31154BC2F01E}"/>
+                  </a:ext>
+                </a:extLst>
+              </p:cNvPr>
+              <p:cNvSpPr>
+                <a:spLocks noGrp="1"/>
+              </p:cNvSpPr>
+              <p:nvPr>
+                <p:ph idx="1"/>
+              </p:nvPr>
+            </p:nvSpPr>
+            <p:spPr>
+              <a:xfrm>
+                <a:off x="838199" y="1825625"/>
+                <a:ext cx="10942121" cy="4775200"/>
+              </a:xfrm>
+            </p:spPr>
+            <p:txBody>
+              <a:bodyPr>
+                <a:normAutofit lnSpcReduction="10000"/>
+              </a:bodyPr>
+              <a:lstStyle/>
+              <a:p>
+                <a:pPr>
+                  <a:lnSpc>
+                    <a:spcPct val="110000"/>
+                  </a:lnSpc>
+                </a:pPr>
+                <a:r>
+                  <a:rPr lang="en-US" dirty="0"/>
+                  <a:t>For </a:t>
+                </a:r>
+                <a:r>
+                  <a:rPr lang="en-US" b="1" dirty="0"/>
+                  <a:t>Gaussian Splatting</a:t>
+                </a:r>
+                <a:r>
+                  <a:rPr lang="en-US" dirty="0"/>
+                  <a:t>, the rendering operator is the </a:t>
+                </a:r>
+                <a:r>
+                  <a:rPr lang="en-US" b="1" dirty="0"/>
+                  <a:t>tile-based rasterizer</a:t>
+                </a:r>
+                <a:r>
+                  <a:rPr lang="en-US" dirty="0"/>
+                  <a:t>. Inside </a:t>
+                </a:r>
+                <a14:m>
+                  <m:oMath xmlns:m="http://schemas.openxmlformats.org/officeDocument/2006/math">
+                    <m:r>
+                      <a:rPr lang="en-US" b="1" i="1" smtClean="0">
+                        <a:latin typeface="Cambria Math" panose="02040503050406030204" pitchFamily="18" charset="0"/>
+                      </a:rPr>
+                      <m:t>𝑹</m:t>
+                    </m:r>
+                  </m:oMath>
+                </a14:m>
+                <a:r>
+                  <a:rPr lang="en-US" dirty="0"/>
+                  <a:t>, the following happens:</a:t>
+                </a:r>
+              </a:p>
+              <a:p>
+                <a:pPr marL="822960" lvl="1" indent="-365760">
+                  <a:lnSpc>
+                    <a:spcPct val="100000"/>
+                  </a:lnSpc>
+                  <a:buFont typeface="+mj-lt"/>
+                  <a:buAutoNum type="arabicPeriod"/>
+                </a:pPr>
+                <a:r>
+                  <a:rPr lang="en-US" dirty="0"/>
+                  <a:t>Take each Gaussian's 3D position, scale, and rotation, and project it onto the 2D image plane using the camera pose </a:t>
+                </a:r>
+                <a14:m>
+                  <m:oMath xmlns:m="http://schemas.openxmlformats.org/officeDocument/2006/math">
+                    <m:r>
+                      <a:rPr lang="en-US" b="1" i="1" smtClean="0">
+                        <a:latin typeface="Cambria Math" panose="02040503050406030204" pitchFamily="18" charset="0"/>
+                      </a:rPr>
+                      <m:t>𝝅</m:t>
+                    </m:r>
+                  </m:oMath>
+                </a14:m>
+                <a:r>
+                  <a:rPr lang="en-US" dirty="0"/>
+                  <a:t>. The result is a 2D Gaussian on the image.</a:t>
+                </a:r>
+              </a:p>
+              <a:p>
+                <a:pPr marL="822960" lvl="1" indent="-365760">
+                  <a:lnSpc>
+                    <a:spcPct val="100000"/>
+                  </a:lnSpc>
+                  <a:buFont typeface="+mj-lt"/>
+                  <a:buAutoNum type="arabicPeriod"/>
+                </a:pPr>
+                <a:r>
+                  <a:rPr lang="en-US" dirty="0"/>
+                  <a:t>Split the image into small tiles (e.g. 16x16 pixels). For each tile, find which projected Gaussians touch it.</a:t>
+                </a:r>
+              </a:p>
+              <a:p>
+                <a:pPr marL="822960" lvl="1" indent="-365760">
+                  <a:lnSpc>
+                    <a:spcPct val="100000"/>
+                  </a:lnSpc>
+                  <a:buFont typeface="+mj-lt"/>
+                  <a:buAutoNum type="arabicPeriod"/>
+                </a:pPr>
+                <a:r>
+                  <a:rPr lang="en-US" dirty="0"/>
+                  <a:t>Within each tile, sort those Gaussians by depth (front to back).</a:t>
+                </a:r>
+              </a:p>
+              <a:p>
+                <a:pPr marL="822960" lvl="1" indent="-365760">
+                  <a:lnSpc>
+                    <a:spcPct val="100000"/>
+                  </a:lnSpc>
+                  <a:buFont typeface="+mj-lt"/>
+                  <a:buAutoNum type="arabicPeriod"/>
+                </a:pPr>
+                <a:r>
+                  <a:rPr lang="en-US" dirty="0"/>
+                  <a:t>For each pixel in the tile, alpha-composite the Gaussians that touch it: blend their colors weighted by opacity, front to back, until the pixel is fully opaque or the Gaussians run out.</a:t>
+                </a:r>
+              </a:p>
+              <a:p>
+                <a:pPr marL="822960" lvl="1" indent="-365760">
+                  <a:lnSpc>
+                    <a:spcPct val="100000"/>
+                  </a:lnSpc>
+                  <a:buFont typeface="+mj-lt"/>
+                  <a:buAutoNum type="arabicPeriod"/>
+                </a:pPr>
+                <a:r>
+                  <a:rPr lang="en-US" dirty="0"/>
+                  <a:t>Out pops one pixel color.</a:t>
+                </a:r>
+              </a:p>
+            </p:txBody>
+          </p:sp>
+        </mc:Choice>
+        <mc:Fallback>
+          <p:sp>
+            <p:nvSpPr>
+              <p:cNvPr id="3" name="Content Placeholder 2">
+                <a:extLst>
+                  <a:ext uri="{FF2B5EF4-FFF2-40B4-BE49-F238E27FC236}">
+                    <a16:creationId xmlns:a16="http://schemas.microsoft.com/office/drawing/2014/main" id="{415F3940-DE7A-D23A-DDCB-31154BC2F01E}"/>
+                  </a:ext>
+                </a:extLst>
+              </p:cNvPr>
+              <p:cNvSpPr>
+                <a:spLocks noGrp="1" noRot="1" noChangeAspect="1" noMove="1" noResize="1" noEditPoints="1" noAdjustHandles="1" noChangeArrowheads="1" noChangeShapeType="1" noTextEdit="1"/>
+              </p:cNvSpPr>
+              <p:nvPr>
+                <p:ph idx="1"/>
+              </p:nvPr>
+            </p:nvSpPr>
+            <p:spPr>
+              <a:xfrm>
+                <a:off x="838199" y="1825625"/>
+                <a:ext cx="10942121" cy="4775200"/>
+              </a:xfrm>
+              <a:blipFill>
+                <a:blip r:embed="rId3"/>
+                <a:stretch>
+                  <a:fillRect l="-947" t="-1276" r="-1226"/>
+                </a:stretch>
+              </a:blipFill>
+            </p:spPr>
+            <p:txBody>
+              <a:bodyPr/>
+              <a:lstStyle/>
+              <a:p>
+                <a:r>
+                  <a:rPr lang="en-US">
+                    <a:noFill/>
+                  </a:rPr>
+                  <a:t> </a:t>
+                </a:r>
+              </a:p>
+            </p:txBody>
+          </p:sp>
+        </mc:Fallback>
+      </mc:AlternateContent>
+    </p:spTree>
+    <p:extLst>
+      <p:ext uri="{BB962C8B-B14F-4D97-AF65-F5344CB8AC3E}">
+        <p14:creationId xmlns:p14="http://schemas.microsoft.com/office/powerpoint/2010/main" val="4217689829"/>
+      </p:ext>
+    </p:extLst>
+  </p:cSld>
+  <p:clrMapOvr>
+    <a:masterClrMapping/>
+  </p:clrMapOvr>
+</p:sld>
+</file>
+
+<file path=ppt/slides/slide9.xml><?xml version="1.0" encoding="utf-8"?>
 <p:sld xmlns:a="http://schemas.openxmlformats.org/drawingml/2006/main" xmlns:r="http://schemas.openxmlformats.org/officeDocument/2006/relationships" xmlns:p="http://schemas.openxmlformats.org/presentationml/2006/main">
   <p:cSld>
     <p:spTree>
@@ -4946,7 +5961,7 @@
           <p:cNvPr id="2" name="Title 1">
             <a:extLst>
               <a:ext uri="{FF2B5EF4-FFF2-40B4-BE49-F238E27FC236}">
-                <a16:creationId xmlns:a16="http://schemas.microsoft.com/office/drawing/2014/main" id="{9097BCC7-4FF1-3D07-5134-53FC93EFF7C6}"/>
+                <a16:creationId xmlns:a16="http://schemas.microsoft.com/office/drawing/2014/main" id="{AE521544-421E-A3F7-7F55-09C6C7F1EF43}"/>
               </a:ext>
             </a:extLst>
           </p:cNvPr>
@@ -4962,7 +5977,10 @@
           <a:bodyPr/>
           <a:lstStyle/>
           <a:p>
-            <a:endParaRPr lang="en-US"/>
+            <a:r>
+              <a:rPr lang="en-US" dirty="0"/>
+              <a:t>Optimizers</a:t>
+            </a:r>
           </a:p>
         </p:txBody>
       </p:sp>
@@ -4971,7 +5989,7 @@
           <p:cNvPr id="3" name="Content Placeholder 2">
             <a:extLst>
               <a:ext uri="{FF2B5EF4-FFF2-40B4-BE49-F238E27FC236}">
-                <a16:creationId xmlns:a16="http://schemas.microsoft.com/office/drawing/2014/main" id="{1377D735-29DE-3BC4-E96A-310A53AB2648}"/>
+                <a16:creationId xmlns:a16="http://schemas.microsoft.com/office/drawing/2014/main" id="{FD7556D3-4BF0-3C08-0EEA-14321B15A7E4}"/>
               </a:ext>
             </a:extLst>
           </p:cNvPr>
@@ -4982,19 +6000,106 @@
             <p:ph idx="1"/>
           </p:nvPr>
         </p:nvSpPr>
-        <p:spPr/>
-        <p:txBody>
-          <a:bodyPr/>
+        <p:spPr>
+          <a:xfrm>
+            <a:off x="838200" y="1825625"/>
+            <a:ext cx="10927556" cy="4667250"/>
+          </a:xfrm>
+        </p:spPr>
+        <p:txBody>
+          <a:bodyPr>
+            <a:normAutofit fontScale="77500" lnSpcReduction="20000"/>
+          </a:bodyPr>
           <a:lstStyle/>
           <a:p>
-            <a:endParaRPr lang="en-US"/>
+            <a:pPr>
+              <a:lnSpc>
+                <a:spcPts val="2640"/>
+              </a:lnSpc>
+            </a:pPr>
+            <a:r>
+              <a:rPr lang="en-US" b="1" dirty="0"/>
+              <a:t>SGD</a:t>
+            </a:r>
+            <a:r>
+              <a:rPr lang="en-US" dirty="0"/>
+              <a:t> - Step in the direction of the negative gradient, with a fixed learning rate (simplest possible recipe).</a:t>
+            </a:r>
+          </a:p>
+          <a:p>
+            <a:pPr>
+              <a:lnSpc>
+                <a:spcPts val="2640"/>
+              </a:lnSpc>
+            </a:pPr>
+            <a:r>
+              <a:rPr lang="en-US" b="1" dirty="0"/>
+              <a:t>SGD with momentum</a:t>
+            </a:r>
+            <a:r>
+              <a:rPr lang="en-US" dirty="0"/>
+              <a:t> - Keep a running average of past gradients and step in that smoothed direction, which dampens noise and accelerates along consistent descent directions.</a:t>
+            </a:r>
+          </a:p>
+          <a:p>
+            <a:pPr>
+              <a:lnSpc>
+                <a:spcPts val="2640"/>
+              </a:lnSpc>
+            </a:pPr>
+            <a:r>
+              <a:rPr lang="en-US" b="1" dirty="0"/>
+              <a:t>SGD with Nesterov</a:t>
+            </a:r>
+            <a:r>
+              <a:rPr lang="en-US" dirty="0"/>
+              <a:t> - A variant of momentum that "looks ahead" before taking the step, giving slightly better convergence on convex problems.</a:t>
+            </a:r>
+          </a:p>
+          <a:p>
+            <a:pPr>
+              <a:lnSpc>
+                <a:spcPts val="2640"/>
+              </a:lnSpc>
+            </a:pPr>
+            <a:r>
+              <a:rPr lang="en-US" b="1" dirty="0"/>
+              <a:t>Adam</a:t>
+            </a:r>
+            <a:r>
+              <a:rPr lang="en-US" dirty="0"/>
+              <a:t> - Keep a running average of past gradients </a:t>
+            </a:r>
+            <a:r>
+              <a:rPr lang="en-US" i="1" dirty="0"/>
+              <a:t>and</a:t>
+            </a:r>
+            <a:r>
+              <a:rPr lang="en-US" dirty="0"/>
+              <a:t> a running average of past squared gradients, then divide the smoothed gradient by the smoothed magnitude. The effect is a per-parameter adaptive learning rate.</a:t>
+            </a:r>
+          </a:p>
+          <a:p>
+            <a:pPr>
+              <a:lnSpc>
+                <a:spcPts val="2640"/>
+              </a:lnSpc>
+            </a:pPr>
+            <a:r>
+              <a:rPr lang="en-US" b="1" dirty="0"/>
+              <a:t>AdamW</a:t>
+            </a:r>
+            <a:r>
+              <a:rPr lang="en-US" dirty="0"/>
+              <a:t>: Same as Adam, but with weight decay applied as a separate term outside the adaptive scaling, which fixes a subtle interaction in the original Adam formulation.</a:t>
+            </a:r>
           </a:p>
         </p:txBody>
       </p:sp>
     </p:spTree>
     <p:extLst>
       <p:ext uri="{BB962C8B-B14F-4D97-AF65-F5344CB8AC3E}">
-        <p14:creationId xmlns:p14="http://schemas.microsoft.com/office/powerpoint/2010/main" val="439802827"/>
+        <p14:creationId xmlns:p14="http://schemas.microsoft.com/office/powerpoint/2010/main" val="3673883911"/>
       </p:ext>
     </p:extLst>
   </p:cSld>

--- a/documents/project_presentation.pptx
+++ b/documents/project_presentation.pptx
@@ -113,6 +113,11 @@
       </a:defRPr>
     </a:lvl9pPr>
   </p:defaultTextStyle>
+  <p:extLst>
+    <p:ext uri="{EFAFB233-063F-42B5-8137-9DF3F51BA10A}">
+      <p15:sldGuideLst xmlns:p15="http://schemas.microsoft.com/office/powerpoint/2012/main"/>
+    </p:ext>
+  </p:extLst>
 </p:presentation>
 </file>
 
@@ -263,7 +268,7 @@
           <a:p>
             <a:fld id="{B5139BC4-9211-4BA2-A8A7-04A224524DB0}" type="datetimeFigureOut">
               <a:rPr lang="en-US" smtClean="0"/>
-              <a:t>2026-06-09</a:t>
+              <a:t>2026-06-10</a:t>
             </a:fld>
             <a:endParaRPr lang="en-US"/>
           </a:p>
@@ -461,7 +466,7 @@
           <a:p>
             <a:fld id="{B5139BC4-9211-4BA2-A8A7-04A224524DB0}" type="datetimeFigureOut">
               <a:rPr lang="en-US" smtClean="0"/>
-              <a:t>2026-06-09</a:t>
+              <a:t>2026-06-10</a:t>
             </a:fld>
             <a:endParaRPr lang="en-US"/>
           </a:p>
@@ -669,7 +674,7 @@
           <a:p>
             <a:fld id="{B5139BC4-9211-4BA2-A8A7-04A224524DB0}" type="datetimeFigureOut">
               <a:rPr lang="en-US" smtClean="0"/>
-              <a:t>2026-06-09</a:t>
+              <a:t>2026-06-10</a:t>
             </a:fld>
             <a:endParaRPr lang="en-US"/>
           </a:p>
@@ -777,8 +782,8 @@
         </p:nvSpPr>
         <p:spPr>
           <a:xfrm>
-            <a:off x="838200" y="365125"/>
-            <a:ext cx="10942122" cy="1325563"/>
+            <a:off x="592931" y="365126"/>
+            <a:ext cx="11322843" cy="799306"/>
           </a:xfrm>
         </p:spPr>
         <p:txBody>
@@ -797,7 +802,7 @@
           </a:lstStyle>
           <a:p>
             <a:r>
-              <a:rPr lang="en-US"/>
+              <a:rPr lang="en-US" dirty="0"/>
               <a:t>Click to edit Master title style</a:t>
             </a:r>
           </a:p>
@@ -821,8 +826,8 @@
         </p:nvSpPr>
         <p:spPr>
           <a:xfrm>
-            <a:off x="838199" y="1825625"/>
-            <a:ext cx="10942121" cy="4351338"/>
+            <a:off x="592931" y="1243013"/>
+            <a:ext cx="11322844" cy="5307806"/>
           </a:xfrm>
         </p:spPr>
         <p:txBody>
@@ -862,99 +867,6 @@
               <a:rPr lang="en-US"/>
               <a:t>Fifth level</a:t>
             </a:r>
-          </a:p>
-        </p:txBody>
-      </p:sp>
-      <p:sp>
-        <p:nvSpPr>
-          <p:cNvPr id="4" name="Date Placeholder 3">
-            <a:extLst>
-              <a:ext uri="{FF2B5EF4-FFF2-40B4-BE49-F238E27FC236}">
-                <a16:creationId xmlns:a16="http://schemas.microsoft.com/office/drawing/2014/main" id="{74C71DAE-B05D-34EF-3147-7408D2C2BB5D}"/>
-              </a:ext>
-            </a:extLst>
-          </p:cNvPr>
-          <p:cNvSpPr>
-            <a:spLocks noGrp="1"/>
-          </p:cNvSpPr>
-          <p:nvPr>
-            <p:ph type="dt" sz="half" idx="10"/>
-          </p:nvPr>
-        </p:nvSpPr>
-        <p:spPr/>
-        <p:txBody>
-          <a:bodyPr/>
-          <a:lstStyle/>
-          <a:p>
-            <a:fld id="{B5139BC4-9211-4BA2-A8A7-04A224524DB0}" type="datetimeFigureOut">
-              <a:rPr lang="en-US" smtClean="0"/>
-              <a:t>2026-06-09</a:t>
-            </a:fld>
-            <a:endParaRPr lang="en-US"/>
-          </a:p>
-        </p:txBody>
-      </p:sp>
-      <p:sp>
-        <p:nvSpPr>
-          <p:cNvPr id="5" name="Footer Placeholder 4">
-            <a:extLst>
-              <a:ext uri="{FF2B5EF4-FFF2-40B4-BE49-F238E27FC236}">
-                <a16:creationId xmlns:a16="http://schemas.microsoft.com/office/drawing/2014/main" id="{4F189B31-2565-4344-B6A1-49B990E5B1E2}"/>
-              </a:ext>
-            </a:extLst>
-          </p:cNvPr>
-          <p:cNvSpPr>
-            <a:spLocks noGrp="1"/>
-          </p:cNvSpPr>
-          <p:nvPr>
-            <p:ph type="ftr" sz="quarter" idx="11"/>
-          </p:nvPr>
-        </p:nvSpPr>
-        <p:spPr>
-          <a:xfrm>
-            <a:off x="4038600" y="6356350"/>
-            <a:ext cx="4658096" cy="365125"/>
-          </a:xfrm>
-        </p:spPr>
-        <p:txBody>
-          <a:bodyPr/>
-          <a:lstStyle/>
-          <a:p>
-            <a:endParaRPr lang="en-US" dirty="0"/>
-          </a:p>
-        </p:txBody>
-      </p:sp>
-      <p:sp>
-        <p:nvSpPr>
-          <p:cNvPr id="6" name="Slide Number Placeholder 5">
-            <a:extLst>
-              <a:ext uri="{FF2B5EF4-FFF2-40B4-BE49-F238E27FC236}">
-                <a16:creationId xmlns:a16="http://schemas.microsoft.com/office/drawing/2014/main" id="{3E159555-AF26-6959-8804-B6B83BD8F139}"/>
-              </a:ext>
-            </a:extLst>
-          </p:cNvPr>
-          <p:cNvSpPr>
-            <a:spLocks noGrp="1"/>
-          </p:cNvSpPr>
-          <p:nvPr>
-            <p:ph type="sldNum" sz="quarter" idx="12"/>
-          </p:nvPr>
-        </p:nvSpPr>
-        <p:spPr>
-          <a:xfrm>
-            <a:off x="9037120" y="6356350"/>
-            <a:ext cx="2743200" cy="365125"/>
-          </a:xfrm>
-        </p:spPr>
-        <p:txBody>
-          <a:bodyPr/>
-          <a:lstStyle/>
-          <a:p>
-            <a:fld id="{931623F1-B7C6-497A-8140-366B798BA5EB}" type="slidenum">
-              <a:rPr lang="en-US" smtClean="0"/>
-              <a:t>‹#›</a:t>
-            </a:fld>
-            <a:endParaRPr lang="en-US"/>
           </a:p>
         </p:txBody>
       </p:sp>
@@ -1173,7 +1085,7 @@
           <a:p>
             <a:fld id="{B5139BC4-9211-4BA2-A8A7-04A224524DB0}" type="datetimeFigureOut">
               <a:rPr lang="en-US" smtClean="0"/>
-              <a:t>2026-06-09</a:t>
+              <a:t>2026-06-10</a:t>
             </a:fld>
             <a:endParaRPr lang="en-US"/>
           </a:p>
@@ -1438,7 +1350,7 @@
           <a:p>
             <a:fld id="{B5139BC4-9211-4BA2-A8A7-04A224524DB0}" type="datetimeFigureOut">
               <a:rPr lang="en-US" smtClean="0"/>
-              <a:t>2026-06-09</a:t>
+              <a:t>2026-06-10</a:t>
             </a:fld>
             <a:endParaRPr lang="en-US"/>
           </a:p>
@@ -1850,7 +1762,7 @@
           <a:p>
             <a:fld id="{B5139BC4-9211-4BA2-A8A7-04A224524DB0}" type="datetimeFigureOut">
               <a:rPr lang="en-US" smtClean="0"/>
-              <a:t>2026-06-09</a:t>
+              <a:t>2026-06-10</a:t>
             </a:fld>
             <a:endParaRPr lang="en-US"/>
           </a:p>
@@ -1991,7 +1903,7 @@
           <a:p>
             <a:fld id="{B5139BC4-9211-4BA2-A8A7-04A224524DB0}" type="datetimeFigureOut">
               <a:rPr lang="en-US" smtClean="0"/>
-              <a:t>2026-06-09</a:t>
+              <a:t>2026-06-10</a:t>
             </a:fld>
             <a:endParaRPr lang="en-US"/>
           </a:p>
@@ -2104,7 +2016,7 @@
           <a:p>
             <a:fld id="{B5139BC4-9211-4BA2-A8A7-04A224524DB0}" type="datetimeFigureOut">
               <a:rPr lang="en-US" smtClean="0"/>
-              <a:t>2026-06-09</a:t>
+              <a:t>2026-06-10</a:t>
             </a:fld>
             <a:endParaRPr lang="en-US"/>
           </a:p>
@@ -2415,7 +2327,7 @@
           <a:p>
             <a:fld id="{B5139BC4-9211-4BA2-A8A7-04A224524DB0}" type="datetimeFigureOut">
               <a:rPr lang="en-US" smtClean="0"/>
-              <a:t>2026-06-09</a:t>
+              <a:t>2026-06-10</a:t>
             </a:fld>
             <a:endParaRPr lang="en-US"/>
           </a:p>
@@ -2703,7 +2615,7 @@
           <a:p>
             <a:fld id="{B5139BC4-9211-4BA2-A8A7-04A224524DB0}" type="datetimeFigureOut">
               <a:rPr lang="en-US" smtClean="0"/>
-              <a:t>2026-06-09</a:t>
+              <a:t>2026-06-10</a:t>
             </a:fld>
             <a:endParaRPr lang="en-US"/>
           </a:p>
@@ -2944,7 +2856,7 @@
           <a:p>
             <a:fld id="{B5139BC4-9211-4BA2-A8A7-04A224524DB0}" type="datetimeFigureOut">
               <a:rPr lang="en-US" smtClean="0"/>
-              <a:t>2026-06-09</a:t>
+              <a:t>2026-06-10</a:t>
             </a:fld>
             <a:endParaRPr lang="en-US"/>
           </a:p>
@@ -3415,7 +3327,7 @@
         </p:nvSpPr>
         <p:spPr>
           <a:xfrm>
-            <a:off x="1070372" y="838580"/>
+            <a:off x="1070372" y="734675"/>
             <a:ext cx="10051255" cy="973932"/>
           </a:xfrm>
         </p:spPr>
@@ -3426,7 +3338,7 @@
           <a:lstStyle/>
           <a:p>
             <a:r>
-              <a:rPr lang="en-US" sz="4000" b="1" dirty="0">
+              <a:rPr lang="en-US" sz="4000" dirty="0">
                 <a:solidFill>
                   <a:schemeClr val="tx2">
                     <a:lumMod val="75000"/>
@@ -3436,14 +3348,6 @@
               </a:rPr>
               <a:t>Optimization for 3D Scene Reconstruction</a:t>
             </a:r>
-            <a:endParaRPr lang="en-US" sz="4000" dirty="0">
-              <a:solidFill>
-                <a:schemeClr val="tx2">
-                  <a:lumMod val="75000"/>
-                  <a:lumOff val="25000"/>
-                </a:schemeClr>
-              </a:solidFill>
-            </a:endParaRPr>
           </a:p>
         </p:txBody>
       </p:sp>
@@ -3465,7 +3369,7 @@
         </p:nvSpPr>
         <p:spPr>
           <a:xfrm>
-            <a:off x="507205" y="1876012"/>
+            <a:off x="507205" y="1772107"/>
             <a:ext cx="11165681" cy="826552"/>
           </a:xfrm>
         </p:spPr>
@@ -3475,23 +3379,47 @@
           </a:bodyPr>
           <a:lstStyle/>
           <a:p>
+            <a:r>
+              <a:rPr lang="en-US" sz="2000" dirty="0">
+                <a:solidFill>
+                  <a:srgbClr val="C00000"/>
+                </a:solidFill>
+              </a:rPr>
+              <a:t>A Comparative Study of Optimizers, Losses, and Representations</a:t>
+            </a:r>
+          </a:p>
+          <a:p>
+            <a:r>
+              <a:rPr lang="en-US" sz="2000" dirty="0">
+                <a:solidFill>
+                  <a:srgbClr val="C00000"/>
+                </a:solidFill>
+              </a:rPr>
+              <a:t>for </a:t>
+            </a:r>
             <a:r>
               <a:rPr lang="en-US" sz="2000" b="1" dirty="0">
                 <a:solidFill>
                   <a:srgbClr val="C00000"/>
                 </a:solidFill>
               </a:rPr>
-              <a:t>A Comparative Study of Optimizers, Losses, and Representations</a:t>
-            </a:r>
-          </a:p>
-          <a:p>
+              <a:t>NeRF</a:t>
+            </a:r>
+            <a:r>
+              <a:rPr lang="en-US" sz="2000" dirty="0">
+                <a:solidFill>
+                  <a:srgbClr val="C00000"/>
+                </a:solidFill>
+              </a:rPr>
+              <a:t> and </a:t>
+            </a:r>
             <a:r>
               <a:rPr lang="en-US" sz="2000" b="1" dirty="0">
                 <a:solidFill>
                   <a:srgbClr val="C00000"/>
                 </a:solidFill>
               </a:rPr>
-              <a:t>for NeRF and 3D Gaussian Splatting</a:t>
+              <a:t>3D Gaussian Splatting</a:t>
             </a:r>
           </a:p>
         </p:txBody>
@@ -3603,7 +3531,7 @@
         </p:blipFill>
         <p:spPr>
           <a:xfrm>
-            <a:off x="10075177" y="2902591"/>
+            <a:off x="9791159" y="2722482"/>
             <a:ext cx="1236307" cy="3502868"/>
           </a:xfrm>
           <a:prstGeom prst="rect">
@@ -3633,7 +3561,7 @@
         </p:blipFill>
         <p:spPr>
           <a:xfrm>
-            <a:off x="4549698" y="3429000"/>
+            <a:off x="4549698" y="3248891"/>
             <a:ext cx="3167943" cy="2588210"/>
           </a:xfrm>
           <a:prstGeom prst="rect">
@@ -3663,7 +3591,7 @@
         </p:blipFill>
         <p:spPr>
           <a:xfrm>
-            <a:off x="507205" y="3456222"/>
+            <a:off x="715022" y="3276113"/>
             <a:ext cx="2655445" cy="2985725"/>
           </a:xfrm>
           <a:prstGeom prst="rect">
@@ -4005,8 +3933,8 @@
           </a:p>
         </p:txBody>
       </p:sp>
-      <mc:AlternateContent xmlns:mc="http://schemas.openxmlformats.org/markup-compatibility/2006">
-        <mc:Choice xmlns:a14="http://schemas.microsoft.com/office/drawing/2010/main" Requires="a14">
+      <mc:AlternateContent xmlns:mc="http://schemas.openxmlformats.org/markup-compatibility/2006" xmlns:a14="http://schemas.microsoft.com/office/drawing/2010/main">
+        <mc:Choice Requires="a14">
           <p:sp>
             <p:nvSpPr>
               <p:cNvPr id="3" name="Content Placeholder 2">
@@ -4575,7 +4503,7 @@
             </p:txBody>
           </p:sp>
         </mc:Choice>
-        <mc:Fallback>
+        <mc:Fallback xmlns="">
           <p:sp>
             <p:nvSpPr>
               <p:cNvPr id="3" name="Content Placeholder 2">
@@ -4695,8 +4623,8 @@
         </p:nvSpPr>
         <p:spPr>
           <a:xfrm>
-            <a:off x="838199" y="1825625"/>
-            <a:ext cx="10942121" cy="4667250"/>
+            <a:off x="592931" y="1164432"/>
+            <a:ext cx="11322843" cy="5328443"/>
           </a:xfrm>
         </p:spPr>
         <p:txBody>
@@ -4710,7 +4638,15 @@
             </a:pPr>
             <a:r>
               <a:rPr lang="en-US" dirty="0"/>
-              <a:t>A scene reconstruction method that represents a 3D scene as a small multi-layer perceptron mapping any 3D point and viewing direction to a density and color.</a:t>
+              <a:t>A scene reconstruction method that represents a 3D scene as a </a:t>
+            </a:r>
+            <a:r>
+              <a:rPr lang="en-US" b="1" dirty="0"/>
+              <a:t>small multi-layer perceptron</a:t>
+            </a:r>
+            <a:r>
+              <a:rPr lang="en-US" dirty="0"/>
+              <a:t> mapping any 3D point and viewing direction to a density and color.</a:t>
             </a:r>
           </a:p>
           <a:p>
@@ -4721,8 +4657,85 @@
             </a:pPr>
             <a:r>
               <a:rPr lang="en-US" dirty="0"/>
-              <a:t>The scene parameters are the MLP weights, and they are fitted by gradient descent through a differentiable volume-rendering operator that composites samples along each pixel ray into the final image.</a:t>
-            </a:r>
+              <a:t>The scene parameters are the MLP weights, and they are </a:t>
+            </a:r>
+            <a:r>
+              <a:rPr lang="en-US" b="1" dirty="0"/>
+              <a:t>fitted by gradient descent through a differentiable volume-rendering operator</a:t>
+            </a:r>
+            <a:r>
+              <a:rPr lang="en-US" dirty="0"/>
+              <a:t> that composites samples along each pixel ray into the final image.</a:t>
+            </a:r>
+          </a:p>
+        </p:txBody>
+      </p:sp>
+      <p:pic>
+        <p:nvPicPr>
+          <p:cNvPr id="5" name="Picture 4">
+            <a:extLst>
+              <a:ext uri="{FF2B5EF4-FFF2-40B4-BE49-F238E27FC236}">
+                <a16:creationId xmlns:a16="http://schemas.microsoft.com/office/drawing/2014/main" id="{FB18127E-EC76-C261-5C7F-1CF6837F6616}"/>
+              </a:ext>
+            </a:extLst>
+          </p:cNvPr>
+          <p:cNvPicPr>
+            <a:picLocks noChangeAspect="1"/>
+          </p:cNvPicPr>
+          <p:nvPr/>
+        </p:nvPicPr>
+        <p:blipFill>
+          <a:blip r:embed="rId2"/>
+          <a:stretch>
+            <a:fillRect/>
+          </a:stretch>
+        </p:blipFill>
+        <p:spPr>
+          <a:xfrm>
+            <a:off x="650083" y="4039908"/>
+            <a:ext cx="10907500" cy="2532342"/>
+          </a:xfrm>
+          <a:prstGeom prst="rect">
+            <a:avLst/>
+          </a:prstGeom>
+        </p:spPr>
+      </p:pic>
+      <p:sp>
+        <p:nvSpPr>
+          <p:cNvPr id="7" name="TextBox 6">
+            <a:extLst>
+              <a:ext uri="{FF2B5EF4-FFF2-40B4-BE49-F238E27FC236}">
+                <a16:creationId xmlns:a16="http://schemas.microsoft.com/office/drawing/2014/main" id="{99E4E0F0-D120-B374-986F-C4D45ECE0243}"/>
+              </a:ext>
+            </a:extLst>
+          </p:cNvPr>
+          <p:cNvSpPr txBox="1"/>
+          <p:nvPr/>
+        </p:nvSpPr>
+        <p:spPr>
+          <a:xfrm>
+            <a:off x="9444037" y="6515098"/>
+            <a:ext cx="2170697" cy="253916"/>
+          </a:xfrm>
+          <a:prstGeom prst="rect">
+            <a:avLst/>
+          </a:prstGeom>
+          <a:noFill/>
+        </p:spPr>
+        <p:txBody>
+          <a:bodyPr wrap="square">
+            <a:spAutoFit/>
+          </a:bodyPr>
+          <a:lstStyle/>
+          <a:p>
+            <a:pPr algn="r"/>
+            <a:r>
+              <a:rPr lang="en-US" sz="1000" dirty="0">
+                <a:hlinkClick r:id="rId3"/>
+              </a:rPr>
+              <a:t>https://arxiv.org/pdf/2003.08934</a:t>
+            </a:r>
+            <a:endParaRPr lang="en-US" sz="1000" dirty="0"/>
           </a:p>
         </p:txBody>
       </p:sp>
@@ -4779,7 +4792,7 @@
           <a:p>
             <a:r>
               <a:rPr lang="en-US" dirty="0"/>
-              <a:t>3D Gaussian Splatting</a:t>
+              <a:t>3D Gaussian Splatting (3DGS)</a:t>
             </a:r>
           </a:p>
         </p:txBody>
@@ -4802,8 +4815,8 @@
         </p:nvSpPr>
         <p:spPr>
           <a:xfrm>
-            <a:off x="838199" y="1825624"/>
-            <a:ext cx="10942121" cy="4575175"/>
+            <a:off x="838199" y="1321594"/>
+            <a:ext cx="10834689" cy="3321845"/>
           </a:xfrm>
         </p:spPr>
         <p:txBody>
@@ -4817,7 +4830,15 @@
             </a:pPr>
             <a:r>
               <a:rPr lang="en-US" dirty="0"/>
-              <a:t>A scene reconstruction method that represents a 3D scene as an explicit collection of 3D Gaussian primitives, each carrying a position, scale, rotation, opacity, and color.</a:t>
+              <a:t>A scene reconstruction method that represents a 3D scene as an explicit </a:t>
+            </a:r>
+            <a:r>
+              <a:rPr lang="en-US" b="1" dirty="0"/>
+              <a:t>collection of 3D Gaussian primitives</a:t>
+            </a:r>
+            <a:r>
+              <a:rPr lang="en-US" dirty="0"/>
+              <a:t>, each carrying a position, scale, rotation, opacity, and color.</a:t>
             </a:r>
           </a:p>
           <a:p>
@@ -4828,7 +4849,87 @@
             </a:pPr>
             <a:r>
               <a:rPr lang="en-US" dirty="0"/>
-              <a:t>The scene parameters are the per-Gaussian tuples, and they are fitted by gradient descent through a differentiable tile-based rasterizer that projects and alpha-composites the primitives into the final image.</a:t>
+              <a:t>The scene parameters are the per-Gaussian tuples, and they are </a:t>
+            </a:r>
+            <a:r>
+              <a:rPr lang="en-US" b="1" dirty="0"/>
+              <a:t>fitted by gradient descent through a differentiable tile-based rasterizer</a:t>
+            </a:r>
+            <a:r>
+              <a:rPr lang="en-US" dirty="0"/>
+              <a:t> that projects and alpha-composites the primitives into the final image.</a:t>
+            </a:r>
+          </a:p>
+        </p:txBody>
+      </p:sp>
+      <p:pic>
+        <p:nvPicPr>
+          <p:cNvPr id="5" name="Picture 4">
+            <a:extLst>
+              <a:ext uri="{FF2B5EF4-FFF2-40B4-BE49-F238E27FC236}">
+                <a16:creationId xmlns:a16="http://schemas.microsoft.com/office/drawing/2014/main" id="{4D42AB63-1F7A-DCCE-16DB-2FDC099BBB80}"/>
+              </a:ext>
+            </a:extLst>
+          </p:cNvPr>
+          <p:cNvPicPr>
+            <a:picLocks noChangeAspect="1"/>
+          </p:cNvPicPr>
+          <p:nvPr/>
+        </p:nvPicPr>
+        <p:blipFill>
+          <a:blip r:embed="rId2"/>
+          <a:stretch>
+            <a:fillRect/>
+          </a:stretch>
+        </p:blipFill>
+        <p:spPr>
+          <a:xfrm>
+            <a:off x="1000123" y="4480923"/>
+            <a:ext cx="10508457" cy="1947082"/>
+          </a:xfrm>
+          <a:prstGeom prst="rect">
+            <a:avLst/>
+          </a:prstGeom>
+        </p:spPr>
+      </p:pic>
+      <p:sp>
+        <p:nvSpPr>
+          <p:cNvPr id="7" name="TextBox 6">
+            <a:extLst>
+              <a:ext uri="{FF2B5EF4-FFF2-40B4-BE49-F238E27FC236}">
+                <a16:creationId xmlns:a16="http://schemas.microsoft.com/office/drawing/2014/main" id="{283FF721-232F-8310-2F48-6B0515790F23}"/>
+              </a:ext>
+            </a:extLst>
+          </p:cNvPr>
+          <p:cNvSpPr txBox="1"/>
+          <p:nvPr/>
+        </p:nvSpPr>
+        <p:spPr>
+          <a:xfrm>
+            <a:off x="866775" y="6428005"/>
+            <a:ext cx="2787848" cy="244258"/>
+          </a:xfrm>
+          <a:prstGeom prst="rect">
+            <a:avLst/>
+          </a:prstGeom>
+          <a:noFill/>
+        </p:spPr>
+        <p:txBody>
+          <a:bodyPr wrap="square">
+            <a:spAutoFit/>
+          </a:bodyPr>
+          <a:lstStyle/>
+          <a:p>
+            <a:pPr algn="r"/>
+            <a:r>
+              <a:rPr lang="en-US" sz="1000" dirty="0">
+                <a:hlinkClick r:id="rId3"/>
+              </a:rPr>
+              <a:t>https://dl.acm.org/doi/epdf/10.1145/3592433</a:t>
+            </a:r>
+            <a:r>
+              <a:rPr lang="en-US" sz="1000" dirty="0"/>
+              <a:t> </a:t>
             </a:r>
           </a:p>
         </p:txBody>
@@ -4891,8 +4992,8 @@
           </a:p>
         </p:txBody>
       </p:sp>
-      <mc:AlternateContent xmlns:mc="http://schemas.openxmlformats.org/markup-compatibility/2006">
-        <mc:Choice xmlns:a14="http://schemas.microsoft.com/office/drawing/2010/main" Requires="a14">
+      <mc:AlternateContent xmlns:mc="http://schemas.openxmlformats.org/markup-compatibility/2006" xmlns:a14="http://schemas.microsoft.com/office/drawing/2010/main">
+        <mc:Choice Requires="a14">
           <p:sp>
             <p:nvSpPr>
               <p:cNvPr id="3" name="Content Placeholder 2">
@@ -5235,7 +5336,7 @@
             </p:txBody>
           </p:sp>
         </mc:Choice>
-        <mc:Fallback>
+        <mc:Fallback xmlns="">
           <p:sp>
             <p:nvSpPr>
               <p:cNvPr id="3" name="Content Placeholder 2">
@@ -5309,8 +5410,8 @@
           <a:chExt cx="0" cy="0"/>
         </a:xfrm>
       </p:grpSpPr>
-      <mc:AlternateContent xmlns:mc="http://schemas.openxmlformats.org/markup-compatibility/2006">
-        <mc:Choice xmlns:a14="http://schemas.microsoft.com/office/drawing/2010/main" Requires="a14">
+      <mc:AlternateContent xmlns:mc="http://schemas.openxmlformats.org/markup-compatibility/2006" xmlns:a14="http://schemas.microsoft.com/office/drawing/2010/main">
+        <mc:Choice Requires="a14">
           <p:sp>
             <p:nvSpPr>
               <p:cNvPr id="2" name="Title 1">
@@ -5350,7 +5451,7 @@
             </p:txBody>
           </p:sp>
         </mc:Choice>
-        <mc:Fallback>
+        <mc:Fallback xmlns="">
           <p:sp>
             <p:nvSpPr>
               <p:cNvPr id="2" name="Title 1">
@@ -5371,7 +5472,7 @@
               <a:blipFill>
                 <a:blip r:embed="rId2"/>
                 <a:stretch>
-                  <a:fillRect/>
+                  <a:fillRect t="-16794" b="-30534"/>
                 </a:stretch>
               </a:blipFill>
             </p:spPr>
@@ -5390,8 +5491,8 @@
           </p:sp>
         </mc:Fallback>
       </mc:AlternateContent>
-      <mc:AlternateContent xmlns:mc="http://schemas.openxmlformats.org/markup-compatibility/2006">
-        <mc:Choice xmlns:a14="http://schemas.microsoft.com/office/drawing/2010/main" Requires="a14">
+      <mc:AlternateContent xmlns:mc="http://schemas.openxmlformats.org/markup-compatibility/2006" xmlns:a14="http://schemas.microsoft.com/office/drawing/2010/main">
+        <mc:Choice Requires="a14">
           <p:sp>
             <p:nvSpPr>
               <p:cNvPr id="3" name="Content Placeholder 2">
@@ -5569,7 +5670,7 @@
             </p:txBody>
           </p:sp>
         </mc:Choice>
-        <mc:Fallback>
+        <mc:Fallback xmlns="">
           <p:sp>
             <p:nvSpPr>
               <p:cNvPr id="3" name="Content Placeholder 2">
@@ -5649,8 +5750,8 @@
           <a:chExt cx="0" cy="0"/>
         </a:xfrm>
       </p:grpSpPr>
-      <mc:AlternateContent xmlns:mc="http://schemas.openxmlformats.org/markup-compatibility/2006">
-        <mc:Choice xmlns:a14="http://schemas.microsoft.com/office/drawing/2010/main" Requires="a14">
+      <mc:AlternateContent xmlns:mc="http://schemas.openxmlformats.org/markup-compatibility/2006" xmlns:a14="http://schemas.microsoft.com/office/drawing/2010/main">
+        <mc:Choice Requires="a14">
           <p:sp>
             <p:nvSpPr>
               <p:cNvPr id="2" name="Title 1">
@@ -5690,7 +5791,7 @@
             </p:txBody>
           </p:sp>
         </mc:Choice>
-        <mc:Fallback>
+        <mc:Fallback xmlns="">
           <p:sp>
             <p:nvSpPr>
               <p:cNvPr id="2" name="Title 1">
@@ -5711,7 +5812,7 @@
               <a:blipFill>
                 <a:blip r:embed="rId2"/>
                 <a:stretch>
-                  <a:fillRect/>
+                  <a:fillRect t="-16794" b="-30534"/>
                 </a:stretch>
               </a:blipFill>
             </p:spPr>
@@ -5730,8 +5831,8 @@
           </p:sp>
         </mc:Fallback>
       </mc:AlternateContent>
-      <mc:AlternateContent xmlns:mc="http://schemas.openxmlformats.org/markup-compatibility/2006">
-        <mc:Choice xmlns:a14="http://schemas.microsoft.com/office/drawing/2010/main" Requires="a14">
+      <mc:AlternateContent xmlns:mc="http://schemas.openxmlformats.org/markup-compatibility/2006" xmlns:a14="http://schemas.microsoft.com/office/drawing/2010/main">
+        <mc:Choice Requires="a14">
           <p:sp>
             <p:nvSpPr>
               <p:cNvPr id="3" name="Content Placeholder 2">
@@ -5882,7 +5983,7 @@
             </p:txBody>
           </p:sp>
         </mc:Choice>
-        <mc:Fallback>
+        <mc:Fallback xmlns="">
           <p:sp>
             <p:nvSpPr>
               <p:cNvPr id="3" name="Content Placeholder 2">

--- a/documents/project_presentation.pptx
+++ b/documents/project_presentation.pptx
@@ -8,9 +8,9 @@
     <p:sldId id="256" r:id="rId2"/>
     <p:sldId id="257" r:id="rId3"/>
     <p:sldId id="258" r:id="rId4"/>
-    <p:sldId id="264" r:id="rId5"/>
-    <p:sldId id="265" r:id="rId6"/>
-    <p:sldId id="261" r:id="rId7"/>
+    <p:sldId id="261" r:id="rId5"/>
+    <p:sldId id="264" r:id="rId6"/>
+    <p:sldId id="265" r:id="rId7"/>
     <p:sldId id="262" r:id="rId8"/>
     <p:sldId id="263" r:id="rId9"/>
     <p:sldId id="259" r:id="rId10"/>
@@ -4582,393 +4582,6 @@
           <p:cNvPr id="2" name="Title 1">
             <a:extLst>
               <a:ext uri="{FF2B5EF4-FFF2-40B4-BE49-F238E27FC236}">
-                <a16:creationId xmlns:a16="http://schemas.microsoft.com/office/drawing/2014/main" id="{8C110E5F-AA02-FF09-38AC-558DFE931E96}"/>
-              </a:ext>
-            </a:extLst>
-          </p:cNvPr>
-          <p:cNvSpPr>
-            <a:spLocks noGrp="1"/>
-          </p:cNvSpPr>
-          <p:nvPr>
-            <p:ph type="title"/>
-          </p:nvPr>
-        </p:nvSpPr>
-        <p:spPr/>
-        <p:txBody>
-          <a:bodyPr/>
-          <a:lstStyle/>
-          <a:p>
-            <a:r>
-              <a:rPr lang="en-US" dirty="0"/>
-              <a:t>NeRF (Neural Radiance Fields)</a:t>
-            </a:r>
-          </a:p>
-        </p:txBody>
-      </p:sp>
-      <p:sp>
-        <p:nvSpPr>
-          <p:cNvPr id="3" name="Content Placeholder 2">
-            <a:extLst>
-              <a:ext uri="{FF2B5EF4-FFF2-40B4-BE49-F238E27FC236}">
-                <a16:creationId xmlns:a16="http://schemas.microsoft.com/office/drawing/2014/main" id="{119442EC-01CD-AEFC-242D-216F0443E0D5}"/>
-              </a:ext>
-            </a:extLst>
-          </p:cNvPr>
-          <p:cNvSpPr>
-            <a:spLocks noGrp="1"/>
-          </p:cNvSpPr>
-          <p:nvPr>
-            <p:ph idx="1"/>
-          </p:nvPr>
-        </p:nvSpPr>
-        <p:spPr>
-          <a:xfrm>
-            <a:off x="592931" y="1164432"/>
-            <a:ext cx="11322843" cy="5328443"/>
-          </a:xfrm>
-        </p:spPr>
-        <p:txBody>
-          <a:bodyPr/>
-          <a:lstStyle/>
-          <a:p>
-            <a:pPr>
-              <a:lnSpc>
-                <a:spcPct val="100000"/>
-              </a:lnSpc>
-            </a:pPr>
-            <a:r>
-              <a:rPr lang="en-US" dirty="0"/>
-              <a:t>A scene reconstruction method that represents a 3D scene as a </a:t>
-            </a:r>
-            <a:r>
-              <a:rPr lang="en-US" b="1" dirty="0"/>
-              <a:t>small multi-layer perceptron</a:t>
-            </a:r>
-            <a:r>
-              <a:rPr lang="en-US" dirty="0"/>
-              <a:t> mapping any 3D point and viewing direction to a density and color.</a:t>
-            </a:r>
-          </a:p>
-          <a:p>
-            <a:pPr>
-              <a:lnSpc>
-                <a:spcPct val="100000"/>
-              </a:lnSpc>
-            </a:pPr>
-            <a:r>
-              <a:rPr lang="en-US" dirty="0"/>
-              <a:t>The scene parameters are the MLP weights, and they are </a:t>
-            </a:r>
-            <a:r>
-              <a:rPr lang="en-US" b="1" dirty="0"/>
-              <a:t>fitted by gradient descent through a differentiable volume-rendering operator</a:t>
-            </a:r>
-            <a:r>
-              <a:rPr lang="en-US" dirty="0"/>
-              <a:t> that composites samples along each pixel ray into the final image.</a:t>
-            </a:r>
-          </a:p>
-        </p:txBody>
-      </p:sp>
-      <p:pic>
-        <p:nvPicPr>
-          <p:cNvPr id="5" name="Picture 4">
-            <a:extLst>
-              <a:ext uri="{FF2B5EF4-FFF2-40B4-BE49-F238E27FC236}">
-                <a16:creationId xmlns:a16="http://schemas.microsoft.com/office/drawing/2014/main" id="{FB18127E-EC76-C261-5C7F-1CF6837F6616}"/>
-              </a:ext>
-            </a:extLst>
-          </p:cNvPr>
-          <p:cNvPicPr>
-            <a:picLocks noChangeAspect="1"/>
-          </p:cNvPicPr>
-          <p:nvPr/>
-        </p:nvPicPr>
-        <p:blipFill>
-          <a:blip r:embed="rId2"/>
-          <a:stretch>
-            <a:fillRect/>
-          </a:stretch>
-        </p:blipFill>
-        <p:spPr>
-          <a:xfrm>
-            <a:off x="650083" y="4039908"/>
-            <a:ext cx="10907500" cy="2532342"/>
-          </a:xfrm>
-          <a:prstGeom prst="rect">
-            <a:avLst/>
-          </a:prstGeom>
-        </p:spPr>
-      </p:pic>
-      <p:sp>
-        <p:nvSpPr>
-          <p:cNvPr id="7" name="TextBox 6">
-            <a:extLst>
-              <a:ext uri="{FF2B5EF4-FFF2-40B4-BE49-F238E27FC236}">
-                <a16:creationId xmlns:a16="http://schemas.microsoft.com/office/drawing/2014/main" id="{99E4E0F0-D120-B374-986F-C4D45ECE0243}"/>
-              </a:ext>
-            </a:extLst>
-          </p:cNvPr>
-          <p:cNvSpPr txBox="1"/>
-          <p:nvPr/>
-        </p:nvSpPr>
-        <p:spPr>
-          <a:xfrm>
-            <a:off x="9444037" y="6515098"/>
-            <a:ext cx="2170697" cy="253916"/>
-          </a:xfrm>
-          <a:prstGeom prst="rect">
-            <a:avLst/>
-          </a:prstGeom>
-          <a:noFill/>
-        </p:spPr>
-        <p:txBody>
-          <a:bodyPr wrap="square">
-            <a:spAutoFit/>
-          </a:bodyPr>
-          <a:lstStyle/>
-          <a:p>
-            <a:pPr algn="r"/>
-            <a:r>
-              <a:rPr lang="en-US" sz="1000" dirty="0">
-                <a:hlinkClick r:id="rId3"/>
-              </a:rPr>
-              <a:t>https://arxiv.org/pdf/2003.08934</a:t>
-            </a:r>
-            <a:endParaRPr lang="en-US" sz="1000" dirty="0"/>
-          </a:p>
-        </p:txBody>
-      </p:sp>
-    </p:spTree>
-    <p:extLst>
-      <p:ext uri="{BB962C8B-B14F-4D97-AF65-F5344CB8AC3E}">
-        <p14:creationId xmlns:p14="http://schemas.microsoft.com/office/powerpoint/2010/main" val="691362837"/>
-      </p:ext>
-    </p:extLst>
-  </p:cSld>
-  <p:clrMapOvr>
-    <a:masterClrMapping/>
-  </p:clrMapOvr>
-</p:sld>
-</file>
-
-<file path=ppt/slides/slide5.xml><?xml version="1.0" encoding="utf-8"?>
-<p:sld xmlns:a="http://schemas.openxmlformats.org/drawingml/2006/main" xmlns:r="http://schemas.openxmlformats.org/officeDocument/2006/relationships" xmlns:p="http://schemas.openxmlformats.org/presentationml/2006/main">
-  <p:cSld>
-    <p:spTree>
-      <p:nvGrpSpPr>
-        <p:cNvPr id="1" name=""/>
-        <p:cNvGrpSpPr/>
-        <p:nvPr/>
-      </p:nvGrpSpPr>
-      <p:grpSpPr>
-        <a:xfrm>
-          <a:off x="0" y="0"/>
-          <a:ext cx="0" cy="0"/>
-          <a:chOff x="0" y="0"/>
-          <a:chExt cx="0" cy="0"/>
-        </a:xfrm>
-      </p:grpSpPr>
-      <p:sp>
-        <p:nvSpPr>
-          <p:cNvPr id="2" name="Title 1">
-            <a:extLst>
-              <a:ext uri="{FF2B5EF4-FFF2-40B4-BE49-F238E27FC236}">
-                <a16:creationId xmlns:a16="http://schemas.microsoft.com/office/drawing/2014/main" id="{71463E8B-9E8F-886F-2EFE-718087FC56B4}"/>
-              </a:ext>
-            </a:extLst>
-          </p:cNvPr>
-          <p:cNvSpPr>
-            <a:spLocks noGrp="1"/>
-          </p:cNvSpPr>
-          <p:nvPr>
-            <p:ph type="title"/>
-          </p:nvPr>
-        </p:nvSpPr>
-        <p:spPr/>
-        <p:txBody>
-          <a:bodyPr/>
-          <a:lstStyle/>
-          <a:p>
-            <a:r>
-              <a:rPr lang="en-US" dirty="0"/>
-              <a:t>3D Gaussian Splatting (3DGS)</a:t>
-            </a:r>
-          </a:p>
-        </p:txBody>
-      </p:sp>
-      <p:sp>
-        <p:nvSpPr>
-          <p:cNvPr id="3" name="Content Placeholder 2">
-            <a:extLst>
-              <a:ext uri="{FF2B5EF4-FFF2-40B4-BE49-F238E27FC236}">
-                <a16:creationId xmlns:a16="http://schemas.microsoft.com/office/drawing/2014/main" id="{45E916F1-B8BB-0B18-645C-232DE03DEA77}"/>
-              </a:ext>
-            </a:extLst>
-          </p:cNvPr>
-          <p:cNvSpPr>
-            <a:spLocks noGrp="1"/>
-          </p:cNvSpPr>
-          <p:nvPr>
-            <p:ph idx="1"/>
-          </p:nvPr>
-        </p:nvSpPr>
-        <p:spPr>
-          <a:xfrm>
-            <a:off x="838199" y="1321594"/>
-            <a:ext cx="10834689" cy="3321845"/>
-          </a:xfrm>
-        </p:spPr>
-        <p:txBody>
-          <a:bodyPr/>
-          <a:lstStyle/>
-          <a:p>
-            <a:pPr>
-              <a:lnSpc>
-                <a:spcPct val="100000"/>
-              </a:lnSpc>
-            </a:pPr>
-            <a:r>
-              <a:rPr lang="en-US" dirty="0"/>
-              <a:t>A scene reconstruction method that represents a 3D scene as an explicit </a:t>
-            </a:r>
-            <a:r>
-              <a:rPr lang="en-US" b="1" dirty="0"/>
-              <a:t>collection of 3D Gaussian primitives</a:t>
-            </a:r>
-            <a:r>
-              <a:rPr lang="en-US" dirty="0"/>
-              <a:t>, each carrying a position, scale, rotation, opacity, and color.</a:t>
-            </a:r>
-          </a:p>
-          <a:p>
-            <a:pPr>
-              <a:lnSpc>
-                <a:spcPct val="100000"/>
-              </a:lnSpc>
-            </a:pPr>
-            <a:r>
-              <a:rPr lang="en-US" dirty="0"/>
-              <a:t>The scene parameters are the per-Gaussian tuples, and they are </a:t>
-            </a:r>
-            <a:r>
-              <a:rPr lang="en-US" b="1" dirty="0"/>
-              <a:t>fitted by gradient descent through a differentiable tile-based rasterizer</a:t>
-            </a:r>
-            <a:r>
-              <a:rPr lang="en-US" dirty="0"/>
-              <a:t> that projects and alpha-composites the primitives into the final image.</a:t>
-            </a:r>
-          </a:p>
-        </p:txBody>
-      </p:sp>
-      <p:pic>
-        <p:nvPicPr>
-          <p:cNvPr id="5" name="Picture 4">
-            <a:extLst>
-              <a:ext uri="{FF2B5EF4-FFF2-40B4-BE49-F238E27FC236}">
-                <a16:creationId xmlns:a16="http://schemas.microsoft.com/office/drawing/2014/main" id="{4D42AB63-1F7A-DCCE-16DB-2FDC099BBB80}"/>
-              </a:ext>
-            </a:extLst>
-          </p:cNvPr>
-          <p:cNvPicPr>
-            <a:picLocks noChangeAspect="1"/>
-          </p:cNvPicPr>
-          <p:nvPr/>
-        </p:nvPicPr>
-        <p:blipFill>
-          <a:blip r:embed="rId2"/>
-          <a:stretch>
-            <a:fillRect/>
-          </a:stretch>
-        </p:blipFill>
-        <p:spPr>
-          <a:xfrm>
-            <a:off x="1000123" y="4480923"/>
-            <a:ext cx="10508457" cy="1947082"/>
-          </a:xfrm>
-          <a:prstGeom prst="rect">
-            <a:avLst/>
-          </a:prstGeom>
-        </p:spPr>
-      </p:pic>
-      <p:sp>
-        <p:nvSpPr>
-          <p:cNvPr id="7" name="TextBox 6">
-            <a:extLst>
-              <a:ext uri="{FF2B5EF4-FFF2-40B4-BE49-F238E27FC236}">
-                <a16:creationId xmlns:a16="http://schemas.microsoft.com/office/drawing/2014/main" id="{283FF721-232F-8310-2F48-6B0515790F23}"/>
-              </a:ext>
-            </a:extLst>
-          </p:cNvPr>
-          <p:cNvSpPr txBox="1"/>
-          <p:nvPr/>
-        </p:nvSpPr>
-        <p:spPr>
-          <a:xfrm>
-            <a:off x="866775" y="6428005"/>
-            <a:ext cx="2787848" cy="244258"/>
-          </a:xfrm>
-          <a:prstGeom prst="rect">
-            <a:avLst/>
-          </a:prstGeom>
-          <a:noFill/>
-        </p:spPr>
-        <p:txBody>
-          <a:bodyPr wrap="square">
-            <a:spAutoFit/>
-          </a:bodyPr>
-          <a:lstStyle/>
-          <a:p>
-            <a:pPr algn="r"/>
-            <a:r>
-              <a:rPr lang="en-US" sz="1000" dirty="0">
-                <a:hlinkClick r:id="rId3"/>
-              </a:rPr>
-              <a:t>https://dl.acm.org/doi/epdf/10.1145/3592433</a:t>
-            </a:r>
-            <a:r>
-              <a:rPr lang="en-US" sz="1000" dirty="0"/>
-              <a:t> </a:t>
-            </a:r>
-          </a:p>
-        </p:txBody>
-      </p:sp>
-    </p:spTree>
-    <p:extLst>
-      <p:ext uri="{BB962C8B-B14F-4D97-AF65-F5344CB8AC3E}">
-        <p14:creationId xmlns:p14="http://schemas.microsoft.com/office/powerpoint/2010/main" val="1061477257"/>
-      </p:ext>
-    </p:extLst>
-  </p:cSld>
-  <p:clrMapOvr>
-    <a:masterClrMapping/>
-  </p:clrMapOvr>
-</p:sld>
-</file>
-
-<file path=ppt/slides/slide6.xml><?xml version="1.0" encoding="utf-8"?>
-<p:sld xmlns:a="http://schemas.openxmlformats.org/drawingml/2006/main" xmlns:r="http://schemas.openxmlformats.org/officeDocument/2006/relationships" xmlns:p="http://schemas.openxmlformats.org/presentationml/2006/main">
-  <p:cSld>
-    <p:spTree>
-      <p:nvGrpSpPr>
-        <p:cNvPr id="1" name=""/>
-        <p:cNvGrpSpPr/>
-        <p:nvPr/>
-      </p:nvGrpSpPr>
-      <p:grpSpPr>
-        <a:xfrm>
-          <a:off x="0" y="0"/>
-          <a:ext cx="0" cy="0"/>
-          <a:chOff x="0" y="0"/>
-          <a:chExt cx="0" cy="0"/>
-        </a:xfrm>
-      </p:grpSpPr>
-      <p:sp>
-        <p:nvSpPr>
-          <p:cNvPr id="2" name="Title 1">
-            <a:extLst>
-              <a:ext uri="{FF2B5EF4-FFF2-40B4-BE49-F238E27FC236}">
                 <a16:creationId xmlns:a16="http://schemas.microsoft.com/office/drawing/2014/main" id="{32C9C17A-3264-21C3-B158-28491B36ACF3}"/>
               </a:ext>
             </a:extLst>
@@ -5384,6 +4997,393 @@
     <p:extLst>
       <p:ext uri="{BB962C8B-B14F-4D97-AF65-F5344CB8AC3E}">
         <p14:creationId xmlns:p14="http://schemas.microsoft.com/office/powerpoint/2010/main" val="3236866454"/>
+      </p:ext>
+    </p:extLst>
+  </p:cSld>
+  <p:clrMapOvr>
+    <a:masterClrMapping/>
+  </p:clrMapOvr>
+</p:sld>
+</file>
+
+<file path=ppt/slides/slide5.xml><?xml version="1.0" encoding="utf-8"?>
+<p:sld xmlns:a="http://schemas.openxmlformats.org/drawingml/2006/main" xmlns:r="http://schemas.openxmlformats.org/officeDocument/2006/relationships" xmlns:p="http://schemas.openxmlformats.org/presentationml/2006/main">
+  <p:cSld>
+    <p:spTree>
+      <p:nvGrpSpPr>
+        <p:cNvPr id="1" name=""/>
+        <p:cNvGrpSpPr/>
+        <p:nvPr/>
+      </p:nvGrpSpPr>
+      <p:grpSpPr>
+        <a:xfrm>
+          <a:off x="0" y="0"/>
+          <a:ext cx="0" cy="0"/>
+          <a:chOff x="0" y="0"/>
+          <a:chExt cx="0" cy="0"/>
+        </a:xfrm>
+      </p:grpSpPr>
+      <p:sp>
+        <p:nvSpPr>
+          <p:cNvPr id="2" name="Title 1">
+            <a:extLst>
+              <a:ext uri="{FF2B5EF4-FFF2-40B4-BE49-F238E27FC236}">
+                <a16:creationId xmlns:a16="http://schemas.microsoft.com/office/drawing/2014/main" id="{8C110E5F-AA02-FF09-38AC-558DFE931E96}"/>
+              </a:ext>
+            </a:extLst>
+          </p:cNvPr>
+          <p:cNvSpPr>
+            <a:spLocks noGrp="1"/>
+          </p:cNvSpPr>
+          <p:nvPr>
+            <p:ph type="title"/>
+          </p:nvPr>
+        </p:nvSpPr>
+        <p:spPr/>
+        <p:txBody>
+          <a:bodyPr/>
+          <a:lstStyle/>
+          <a:p>
+            <a:r>
+              <a:rPr lang="en-US" dirty="0"/>
+              <a:t>NeRF (Neural Radiance Fields)</a:t>
+            </a:r>
+          </a:p>
+        </p:txBody>
+      </p:sp>
+      <p:sp>
+        <p:nvSpPr>
+          <p:cNvPr id="3" name="Content Placeholder 2">
+            <a:extLst>
+              <a:ext uri="{FF2B5EF4-FFF2-40B4-BE49-F238E27FC236}">
+                <a16:creationId xmlns:a16="http://schemas.microsoft.com/office/drawing/2014/main" id="{119442EC-01CD-AEFC-242D-216F0443E0D5}"/>
+              </a:ext>
+            </a:extLst>
+          </p:cNvPr>
+          <p:cNvSpPr>
+            <a:spLocks noGrp="1"/>
+          </p:cNvSpPr>
+          <p:nvPr>
+            <p:ph idx="1"/>
+          </p:nvPr>
+        </p:nvSpPr>
+        <p:spPr>
+          <a:xfrm>
+            <a:off x="592931" y="1164432"/>
+            <a:ext cx="11322843" cy="5328443"/>
+          </a:xfrm>
+        </p:spPr>
+        <p:txBody>
+          <a:bodyPr/>
+          <a:lstStyle/>
+          <a:p>
+            <a:pPr>
+              <a:lnSpc>
+                <a:spcPct val="100000"/>
+              </a:lnSpc>
+            </a:pPr>
+            <a:r>
+              <a:rPr lang="en-US" dirty="0"/>
+              <a:t>A scene reconstruction method that represents a 3D scene as a </a:t>
+            </a:r>
+            <a:r>
+              <a:rPr lang="en-US" b="1" dirty="0"/>
+              <a:t>small multi-layer perceptron</a:t>
+            </a:r>
+            <a:r>
+              <a:rPr lang="en-US" dirty="0"/>
+              <a:t> mapping any 3D point and viewing direction to a density and color.</a:t>
+            </a:r>
+          </a:p>
+          <a:p>
+            <a:pPr>
+              <a:lnSpc>
+                <a:spcPct val="100000"/>
+              </a:lnSpc>
+            </a:pPr>
+            <a:r>
+              <a:rPr lang="en-US" dirty="0"/>
+              <a:t>The scene parameters are the MLP weights, and they are </a:t>
+            </a:r>
+            <a:r>
+              <a:rPr lang="en-US" b="1" dirty="0"/>
+              <a:t>fitted by gradient descent through a differentiable volume-rendering operator</a:t>
+            </a:r>
+            <a:r>
+              <a:rPr lang="en-US" dirty="0"/>
+              <a:t> that composites samples along each pixel ray into the final image.</a:t>
+            </a:r>
+          </a:p>
+        </p:txBody>
+      </p:sp>
+      <p:pic>
+        <p:nvPicPr>
+          <p:cNvPr id="5" name="Picture 4">
+            <a:extLst>
+              <a:ext uri="{FF2B5EF4-FFF2-40B4-BE49-F238E27FC236}">
+                <a16:creationId xmlns:a16="http://schemas.microsoft.com/office/drawing/2014/main" id="{FB18127E-EC76-C261-5C7F-1CF6837F6616}"/>
+              </a:ext>
+            </a:extLst>
+          </p:cNvPr>
+          <p:cNvPicPr>
+            <a:picLocks noChangeAspect="1"/>
+          </p:cNvPicPr>
+          <p:nvPr/>
+        </p:nvPicPr>
+        <p:blipFill>
+          <a:blip r:embed="rId2"/>
+          <a:stretch>
+            <a:fillRect/>
+          </a:stretch>
+        </p:blipFill>
+        <p:spPr>
+          <a:xfrm>
+            <a:off x="511728" y="3978404"/>
+            <a:ext cx="11070781" cy="2570250"/>
+          </a:xfrm>
+          <a:prstGeom prst="rect">
+            <a:avLst/>
+          </a:prstGeom>
+        </p:spPr>
+      </p:pic>
+      <p:sp>
+        <p:nvSpPr>
+          <p:cNvPr id="7" name="TextBox 6">
+            <a:extLst>
+              <a:ext uri="{FF2B5EF4-FFF2-40B4-BE49-F238E27FC236}">
+                <a16:creationId xmlns:a16="http://schemas.microsoft.com/office/drawing/2014/main" id="{99E4E0F0-D120-B374-986F-C4D45ECE0243}"/>
+              </a:ext>
+            </a:extLst>
+          </p:cNvPr>
+          <p:cNvSpPr txBox="1"/>
+          <p:nvPr/>
+        </p:nvSpPr>
+        <p:spPr>
+          <a:xfrm>
+            <a:off x="9444037" y="6515098"/>
+            <a:ext cx="2170697" cy="253916"/>
+          </a:xfrm>
+          <a:prstGeom prst="rect">
+            <a:avLst/>
+          </a:prstGeom>
+          <a:noFill/>
+        </p:spPr>
+        <p:txBody>
+          <a:bodyPr wrap="square">
+            <a:spAutoFit/>
+          </a:bodyPr>
+          <a:lstStyle/>
+          <a:p>
+            <a:pPr algn="r"/>
+            <a:r>
+              <a:rPr lang="en-US" sz="1000" dirty="0">
+                <a:hlinkClick r:id="rId3"/>
+              </a:rPr>
+              <a:t>https://arxiv.org/pdf/2003.08934</a:t>
+            </a:r>
+            <a:endParaRPr lang="en-US" sz="1000" dirty="0"/>
+          </a:p>
+        </p:txBody>
+      </p:sp>
+    </p:spTree>
+    <p:extLst>
+      <p:ext uri="{BB962C8B-B14F-4D97-AF65-F5344CB8AC3E}">
+        <p14:creationId xmlns:p14="http://schemas.microsoft.com/office/powerpoint/2010/main" val="691362837"/>
+      </p:ext>
+    </p:extLst>
+  </p:cSld>
+  <p:clrMapOvr>
+    <a:masterClrMapping/>
+  </p:clrMapOvr>
+</p:sld>
+</file>
+
+<file path=ppt/slides/slide6.xml><?xml version="1.0" encoding="utf-8"?>
+<p:sld xmlns:a="http://schemas.openxmlformats.org/drawingml/2006/main" xmlns:r="http://schemas.openxmlformats.org/officeDocument/2006/relationships" xmlns:p="http://schemas.openxmlformats.org/presentationml/2006/main">
+  <p:cSld>
+    <p:spTree>
+      <p:nvGrpSpPr>
+        <p:cNvPr id="1" name=""/>
+        <p:cNvGrpSpPr/>
+        <p:nvPr/>
+      </p:nvGrpSpPr>
+      <p:grpSpPr>
+        <a:xfrm>
+          <a:off x="0" y="0"/>
+          <a:ext cx="0" cy="0"/>
+          <a:chOff x="0" y="0"/>
+          <a:chExt cx="0" cy="0"/>
+        </a:xfrm>
+      </p:grpSpPr>
+      <p:sp>
+        <p:nvSpPr>
+          <p:cNvPr id="2" name="Title 1">
+            <a:extLst>
+              <a:ext uri="{FF2B5EF4-FFF2-40B4-BE49-F238E27FC236}">
+                <a16:creationId xmlns:a16="http://schemas.microsoft.com/office/drawing/2014/main" id="{71463E8B-9E8F-886F-2EFE-718087FC56B4}"/>
+              </a:ext>
+            </a:extLst>
+          </p:cNvPr>
+          <p:cNvSpPr>
+            <a:spLocks noGrp="1"/>
+          </p:cNvSpPr>
+          <p:nvPr>
+            <p:ph type="title"/>
+          </p:nvPr>
+        </p:nvSpPr>
+        <p:spPr/>
+        <p:txBody>
+          <a:bodyPr/>
+          <a:lstStyle/>
+          <a:p>
+            <a:r>
+              <a:rPr lang="en-US" dirty="0"/>
+              <a:t>3D Gaussian Splatting (3DGS)</a:t>
+            </a:r>
+          </a:p>
+        </p:txBody>
+      </p:sp>
+      <p:sp>
+        <p:nvSpPr>
+          <p:cNvPr id="3" name="Content Placeholder 2">
+            <a:extLst>
+              <a:ext uri="{FF2B5EF4-FFF2-40B4-BE49-F238E27FC236}">
+                <a16:creationId xmlns:a16="http://schemas.microsoft.com/office/drawing/2014/main" id="{45E916F1-B8BB-0B18-645C-232DE03DEA77}"/>
+              </a:ext>
+            </a:extLst>
+          </p:cNvPr>
+          <p:cNvSpPr>
+            <a:spLocks noGrp="1"/>
+          </p:cNvSpPr>
+          <p:nvPr>
+            <p:ph idx="1"/>
+          </p:nvPr>
+        </p:nvSpPr>
+        <p:spPr>
+          <a:xfrm>
+            <a:off x="838199" y="1321594"/>
+            <a:ext cx="10834689" cy="3321845"/>
+          </a:xfrm>
+        </p:spPr>
+        <p:txBody>
+          <a:bodyPr/>
+          <a:lstStyle/>
+          <a:p>
+            <a:pPr>
+              <a:lnSpc>
+                <a:spcPct val="100000"/>
+              </a:lnSpc>
+            </a:pPr>
+            <a:r>
+              <a:rPr lang="en-US" dirty="0"/>
+              <a:t>A scene reconstruction method that represents a 3D scene as an explicit </a:t>
+            </a:r>
+            <a:r>
+              <a:rPr lang="en-US" b="1" dirty="0"/>
+              <a:t>collection of 3D Gaussian primitives</a:t>
+            </a:r>
+            <a:r>
+              <a:rPr lang="en-US" dirty="0"/>
+              <a:t>, each carrying a position, scale, rotation, opacity, and color.</a:t>
+            </a:r>
+          </a:p>
+          <a:p>
+            <a:pPr>
+              <a:lnSpc>
+                <a:spcPct val="100000"/>
+              </a:lnSpc>
+            </a:pPr>
+            <a:r>
+              <a:rPr lang="en-US" dirty="0"/>
+              <a:t>The scene parameters are the per-Gaussian tuples, and they are </a:t>
+            </a:r>
+            <a:r>
+              <a:rPr lang="en-US" b="1" dirty="0"/>
+              <a:t>fitted by gradient descent through a differentiable tile-based rasterizer</a:t>
+            </a:r>
+            <a:r>
+              <a:rPr lang="en-US" dirty="0"/>
+              <a:t> that projects and alpha-composites the primitives into the final image.</a:t>
+            </a:r>
+          </a:p>
+        </p:txBody>
+      </p:sp>
+      <p:pic>
+        <p:nvPicPr>
+          <p:cNvPr id="5" name="Picture 4">
+            <a:extLst>
+              <a:ext uri="{FF2B5EF4-FFF2-40B4-BE49-F238E27FC236}">
+                <a16:creationId xmlns:a16="http://schemas.microsoft.com/office/drawing/2014/main" id="{4D42AB63-1F7A-DCCE-16DB-2FDC099BBB80}"/>
+              </a:ext>
+            </a:extLst>
+          </p:cNvPr>
+          <p:cNvPicPr>
+            <a:picLocks noChangeAspect="1"/>
+          </p:cNvPicPr>
+          <p:nvPr/>
+        </p:nvPicPr>
+        <p:blipFill>
+          <a:blip r:embed="rId2"/>
+          <a:stretch>
+            <a:fillRect/>
+          </a:stretch>
+        </p:blipFill>
+        <p:spPr>
+          <a:xfrm>
+            <a:off x="1000123" y="4480923"/>
+            <a:ext cx="10508457" cy="1947082"/>
+          </a:xfrm>
+          <a:prstGeom prst="rect">
+            <a:avLst/>
+          </a:prstGeom>
+        </p:spPr>
+      </p:pic>
+      <p:sp>
+        <p:nvSpPr>
+          <p:cNvPr id="7" name="TextBox 6">
+            <a:extLst>
+              <a:ext uri="{FF2B5EF4-FFF2-40B4-BE49-F238E27FC236}">
+                <a16:creationId xmlns:a16="http://schemas.microsoft.com/office/drawing/2014/main" id="{283FF721-232F-8310-2F48-6B0515790F23}"/>
+              </a:ext>
+            </a:extLst>
+          </p:cNvPr>
+          <p:cNvSpPr txBox="1"/>
+          <p:nvPr/>
+        </p:nvSpPr>
+        <p:spPr>
+          <a:xfrm>
+            <a:off x="866775" y="6428005"/>
+            <a:ext cx="2787848" cy="244258"/>
+          </a:xfrm>
+          <a:prstGeom prst="rect">
+            <a:avLst/>
+          </a:prstGeom>
+          <a:noFill/>
+        </p:spPr>
+        <p:txBody>
+          <a:bodyPr wrap="square">
+            <a:spAutoFit/>
+          </a:bodyPr>
+          <a:lstStyle/>
+          <a:p>
+            <a:pPr algn="r"/>
+            <a:r>
+              <a:rPr lang="en-US" sz="1000" dirty="0">
+                <a:hlinkClick r:id="rId3"/>
+              </a:rPr>
+              <a:t>https://dl.acm.org/doi/epdf/10.1145/3592433</a:t>
+            </a:r>
+            <a:r>
+              <a:rPr lang="en-US" sz="1000" dirty="0"/>
+              <a:t> </a:t>
+            </a:r>
+          </a:p>
+        </p:txBody>
+      </p:sp>
+    </p:spTree>
+    <p:extLst>
+      <p:ext uri="{BB962C8B-B14F-4D97-AF65-F5344CB8AC3E}">
+        <p14:creationId xmlns:p14="http://schemas.microsoft.com/office/powerpoint/2010/main" val="1061477257"/>
       </p:ext>
     </p:extLst>
   </p:cSld>
